--- a/越語詩歌/Xuân An Lành.pptx
+++ b/越語詩歌/Xuân An Lành.pptx
@@ -11,6 +11,13 @@
     <p:sldId id="260" r:id="rId5"/>
     <p:sldId id="261" r:id="rId6"/>
     <p:sldId id="262" r:id="rId7"/>
+    <p:sldId id="263" r:id="rId8"/>
+    <p:sldId id="264" r:id="rId9"/>
+    <p:sldId id="265" r:id="rId10"/>
+    <p:sldId id="266" r:id="rId11"/>
+    <p:sldId id="267" r:id="rId12"/>
+    <p:sldId id="268" r:id="rId13"/>
+    <p:sldId id="269" r:id="rId14"/>
   </p:sldIdLst>
   <p:sldSz cx="12192000" cy="6858000"/>
   <p:notesSz cx="6858000" cy="9144000"/>
@@ -109,6 +116,22 @@
       </a:defRPr>
     </a:lvl9pPr>
   </p:defaultTextStyle>
+  <p:extLst>
+    <p:ext uri="{EFAFB233-063F-42B5-8137-9DF3F51BA10A}">
+      <p15:sldGuideLst xmlns:p15="http://schemas.microsoft.com/office/powerpoint/2012/main">
+        <p15:guide id="1" orient="horz" pos="2160">
+          <p15:clr>
+            <a:srgbClr val="A4A3A4"/>
+          </p15:clr>
+        </p15:guide>
+        <p15:guide id="2" pos="3840">
+          <p15:clr>
+            <a:srgbClr val="A4A3A4"/>
+          </p15:clr>
+        </p15:guide>
+      </p15:sldGuideLst>
+    </p:ext>
+  </p:extLst>
 </p:presentation>
 </file>
 
@@ -141,7 +164,7 @@
         </p:nvSpPr>
         <p:spPr>
           <a:xfrm>
-            <a:off x="914400" y="2130426"/>
+            <a:off x="914400" y="2130428"/>
             <a:ext cx="10363200" cy="1470025"/>
           </a:xfrm>
         </p:spPr>
@@ -150,7 +173,7 @@
           <a:lstStyle/>
           <a:p>
             <a:r>
-              <a:rPr lang="en-US" altLang="zh-TW" smtClean="0"/>
+              <a:rPr lang="en-US" altLang="zh-TW"/>
               <a:t>Click to edit Master title style</a:t>
             </a:r>
             <a:endParaRPr lang="zh-TW" altLang="en-US"/>
@@ -269,7 +292,7 @@
           </a:lstStyle>
           <a:p>
             <a:r>
-              <a:rPr lang="en-US" altLang="zh-TW" smtClean="0"/>
+              <a:rPr lang="en-US" altLang="zh-TW"/>
               <a:t>Click to edit Master subtitle style</a:t>
             </a:r>
             <a:endParaRPr lang="zh-TW" altLang="en-US"/>
@@ -291,9 +314,10 @@
           <a:bodyPr/>
           <a:lstStyle/>
           <a:p>
-            <a:fld id="{C68E7312-D940-4E61-9982-FF60E332752E}" type="datetimeFigureOut">
+            <a:fld id="{2F1EBCE9-37A8-40F2-A48F-C8A470C397B9}" type="datetimeFigureOut">
               <a:rPr lang="vi-VN" smtClean="0"/>
-              <a:t>06/02/2020</a:t>
+              <a:pPr/>
+              <a:t>26/01/2025</a:t>
             </a:fld>
             <a:endParaRPr lang="vi-VN"/>
           </a:p>
@@ -333,8 +357,9 @@
           <a:bodyPr/>
           <a:lstStyle/>
           <a:p>
-            <a:fld id="{FDF2C4F2-6C2D-4D6F-9A8A-9C9DE1F34AA6}" type="slidenum">
+            <a:fld id="{13F61CAC-7311-4408-9799-651F6CBD428F}" type="slidenum">
               <a:rPr lang="vi-VN" smtClean="0"/>
+              <a:pPr/>
               <a:t>‹#›</a:t>
             </a:fld>
             <a:endParaRPr lang="vi-VN"/>
@@ -344,7 +369,7 @@
     </p:spTree>
     <p:extLst>
       <p:ext uri="{BB962C8B-B14F-4D97-AF65-F5344CB8AC3E}">
-        <p14:creationId xmlns:p14="http://schemas.microsoft.com/office/powerpoint/2010/main" val="1817870020"/>
+        <p14:creationId xmlns:p14="http://schemas.microsoft.com/office/powerpoint/2010/main" val="2341378072"/>
       </p:ext>
     </p:extLst>
   </p:cSld>
@@ -387,7 +412,7 @@
           <a:lstStyle/>
           <a:p>
             <a:r>
-              <a:rPr lang="en-US" altLang="zh-TW" smtClean="0"/>
+              <a:rPr lang="en-US" altLang="zh-TW"/>
               <a:t>Click to edit Master title style</a:t>
             </a:r>
             <a:endParaRPr lang="zh-TW" altLang="en-US"/>
@@ -411,35 +436,35 @@
           <a:p>
             <a:pPr lvl="0"/>
             <a:r>
-              <a:rPr lang="en-US" altLang="zh-TW" smtClean="0"/>
-              <a:t>Edit Master text styles</a:t>
+              <a:rPr lang="en-US" altLang="zh-TW"/>
+              <a:t>Click to edit Master text styles</a:t>
             </a:r>
           </a:p>
           <a:p>
             <a:pPr lvl="1"/>
             <a:r>
-              <a:rPr lang="en-US" altLang="zh-TW" smtClean="0"/>
+              <a:rPr lang="en-US" altLang="zh-TW"/>
               <a:t>Second level</a:t>
             </a:r>
           </a:p>
           <a:p>
             <a:pPr lvl="2"/>
             <a:r>
-              <a:rPr lang="en-US" altLang="zh-TW" smtClean="0"/>
+              <a:rPr lang="en-US" altLang="zh-TW"/>
               <a:t>Third level</a:t>
             </a:r>
           </a:p>
           <a:p>
             <a:pPr lvl="3"/>
             <a:r>
-              <a:rPr lang="en-US" altLang="zh-TW" smtClean="0"/>
+              <a:rPr lang="en-US" altLang="zh-TW"/>
               <a:t>Fourth level</a:t>
             </a:r>
           </a:p>
           <a:p>
             <a:pPr lvl="4"/>
             <a:r>
-              <a:rPr lang="en-US" altLang="zh-TW" smtClean="0"/>
+              <a:rPr lang="en-US" altLang="zh-TW"/>
               <a:t>Fifth level</a:t>
             </a:r>
             <a:endParaRPr lang="zh-TW" altLang="en-US"/>
@@ -461,9 +486,10 @@
           <a:bodyPr/>
           <a:lstStyle/>
           <a:p>
-            <a:fld id="{C68E7312-D940-4E61-9982-FF60E332752E}" type="datetimeFigureOut">
+            <a:fld id="{2F1EBCE9-37A8-40F2-A48F-C8A470C397B9}" type="datetimeFigureOut">
               <a:rPr lang="vi-VN" smtClean="0"/>
-              <a:t>06/02/2020</a:t>
+              <a:pPr/>
+              <a:t>26/01/2025</a:t>
             </a:fld>
             <a:endParaRPr lang="vi-VN"/>
           </a:p>
@@ -503,8 +529,9 @@
           <a:bodyPr/>
           <a:lstStyle/>
           <a:p>
-            <a:fld id="{FDF2C4F2-6C2D-4D6F-9A8A-9C9DE1F34AA6}" type="slidenum">
+            <a:fld id="{13F61CAC-7311-4408-9799-651F6CBD428F}" type="slidenum">
               <a:rPr lang="vi-VN" smtClean="0"/>
+              <a:pPr/>
               <a:t>‹#›</a:t>
             </a:fld>
             <a:endParaRPr lang="vi-VN"/>
@@ -514,7 +541,7 @@
     </p:spTree>
     <p:extLst>
       <p:ext uri="{BB962C8B-B14F-4D97-AF65-F5344CB8AC3E}">
-        <p14:creationId xmlns:p14="http://schemas.microsoft.com/office/powerpoint/2010/main" val="2514419399"/>
+        <p14:creationId xmlns:p14="http://schemas.microsoft.com/office/powerpoint/2010/main" val="452186"/>
       </p:ext>
     </p:extLst>
   </p:cSld>
@@ -562,7 +589,7 @@
           <a:lstStyle/>
           <a:p>
             <a:r>
-              <a:rPr lang="en-US" altLang="zh-TW" smtClean="0"/>
+              <a:rPr lang="en-US" altLang="zh-TW"/>
               <a:t>Click to edit Master title style</a:t>
             </a:r>
             <a:endParaRPr lang="zh-TW" altLang="en-US"/>
@@ -591,35 +618,35 @@
           <a:p>
             <a:pPr lvl="0"/>
             <a:r>
-              <a:rPr lang="en-US" altLang="zh-TW" smtClean="0"/>
-              <a:t>Edit Master text styles</a:t>
+              <a:rPr lang="en-US" altLang="zh-TW"/>
+              <a:t>Click to edit Master text styles</a:t>
             </a:r>
           </a:p>
           <a:p>
             <a:pPr lvl="1"/>
             <a:r>
-              <a:rPr lang="en-US" altLang="zh-TW" smtClean="0"/>
+              <a:rPr lang="en-US" altLang="zh-TW"/>
               <a:t>Second level</a:t>
             </a:r>
           </a:p>
           <a:p>
             <a:pPr lvl="2"/>
             <a:r>
-              <a:rPr lang="en-US" altLang="zh-TW" smtClean="0"/>
+              <a:rPr lang="en-US" altLang="zh-TW"/>
               <a:t>Third level</a:t>
             </a:r>
           </a:p>
           <a:p>
             <a:pPr lvl="3"/>
             <a:r>
-              <a:rPr lang="en-US" altLang="zh-TW" smtClean="0"/>
+              <a:rPr lang="en-US" altLang="zh-TW"/>
               <a:t>Fourth level</a:t>
             </a:r>
           </a:p>
           <a:p>
             <a:pPr lvl="4"/>
             <a:r>
-              <a:rPr lang="en-US" altLang="zh-TW" smtClean="0"/>
+              <a:rPr lang="en-US" altLang="zh-TW"/>
               <a:t>Fifth level</a:t>
             </a:r>
             <a:endParaRPr lang="zh-TW" altLang="en-US"/>
@@ -641,9 +668,10 @@
           <a:bodyPr/>
           <a:lstStyle/>
           <a:p>
-            <a:fld id="{C68E7312-D940-4E61-9982-FF60E332752E}" type="datetimeFigureOut">
+            <a:fld id="{2F1EBCE9-37A8-40F2-A48F-C8A470C397B9}" type="datetimeFigureOut">
               <a:rPr lang="vi-VN" smtClean="0"/>
-              <a:t>06/02/2020</a:t>
+              <a:pPr/>
+              <a:t>26/01/2025</a:t>
             </a:fld>
             <a:endParaRPr lang="vi-VN"/>
           </a:p>
@@ -683,8 +711,9 @@
           <a:bodyPr/>
           <a:lstStyle/>
           <a:p>
-            <a:fld id="{FDF2C4F2-6C2D-4D6F-9A8A-9C9DE1F34AA6}" type="slidenum">
+            <a:fld id="{13F61CAC-7311-4408-9799-651F6CBD428F}" type="slidenum">
               <a:rPr lang="vi-VN" smtClean="0"/>
+              <a:pPr/>
               <a:t>‹#›</a:t>
             </a:fld>
             <a:endParaRPr lang="vi-VN"/>
@@ -694,7 +723,7 @@
     </p:spTree>
     <p:extLst>
       <p:ext uri="{BB962C8B-B14F-4D97-AF65-F5344CB8AC3E}">
-        <p14:creationId xmlns:p14="http://schemas.microsoft.com/office/powerpoint/2010/main" val="2538087537"/>
+        <p14:creationId xmlns:p14="http://schemas.microsoft.com/office/powerpoint/2010/main" val="3001462556"/>
       </p:ext>
     </p:extLst>
   </p:cSld>
@@ -737,7 +766,7 @@
           <a:lstStyle/>
           <a:p>
             <a:r>
-              <a:rPr lang="en-US" altLang="zh-TW" smtClean="0"/>
+              <a:rPr lang="en-US" altLang="zh-TW"/>
               <a:t>Click to edit Master title style</a:t>
             </a:r>
             <a:endParaRPr lang="zh-TW" altLang="en-US"/>
@@ -761,35 +790,35 @@
           <a:p>
             <a:pPr lvl="0"/>
             <a:r>
-              <a:rPr lang="en-US" altLang="zh-TW" smtClean="0"/>
-              <a:t>Edit Master text styles</a:t>
+              <a:rPr lang="en-US" altLang="zh-TW"/>
+              <a:t>Click to edit Master text styles</a:t>
             </a:r>
           </a:p>
           <a:p>
             <a:pPr lvl="1"/>
             <a:r>
-              <a:rPr lang="en-US" altLang="zh-TW" smtClean="0"/>
+              <a:rPr lang="en-US" altLang="zh-TW"/>
               <a:t>Second level</a:t>
             </a:r>
           </a:p>
           <a:p>
             <a:pPr lvl="2"/>
             <a:r>
-              <a:rPr lang="en-US" altLang="zh-TW" smtClean="0"/>
+              <a:rPr lang="en-US" altLang="zh-TW"/>
               <a:t>Third level</a:t>
             </a:r>
           </a:p>
           <a:p>
             <a:pPr lvl="3"/>
             <a:r>
-              <a:rPr lang="en-US" altLang="zh-TW" smtClean="0"/>
+              <a:rPr lang="en-US" altLang="zh-TW"/>
               <a:t>Fourth level</a:t>
             </a:r>
           </a:p>
           <a:p>
             <a:pPr lvl="4"/>
             <a:r>
-              <a:rPr lang="en-US" altLang="zh-TW" smtClean="0"/>
+              <a:rPr lang="en-US" altLang="zh-TW"/>
               <a:t>Fifth level</a:t>
             </a:r>
             <a:endParaRPr lang="zh-TW" altLang="en-US"/>
@@ -811,9 +840,10 @@
           <a:bodyPr/>
           <a:lstStyle/>
           <a:p>
-            <a:fld id="{C68E7312-D940-4E61-9982-FF60E332752E}" type="datetimeFigureOut">
+            <a:fld id="{2F1EBCE9-37A8-40F2-A48F-C8A470C397B9}" type="datetimeFigureOut">
               <a:rPr lang="vi-VN" smtClean="0"/>
-              <a:t>06/02/2020</a:t>
+              <a:pPr/>
+              <a:t>26/01/2025</a:t>
             </a:fld>
             <a:endParaRPr lang="vi-VN"/>
           </a:p>
@@ -853,8 +883,9 @@
           <a:bodyPr/>
           <a:lstStyle/>
           <a:p>
-            <a:fld id="{FDF2C4F2-6C2D-4D6F-9A8A-9C9DE1F34AA6}" type="slidenum">
+            <a:fld id="{13F61CAC-7311-4408-9799-651F6CBD428F}" type="slidenum">
               <a:rPr lang="vi-VN" smtClean="0"/>
+              <a:pPr/>
               <a:t>‹#›</a:t>
             </a:fld>
             <a:endParaRPr lang="vi-VN"/>
@@ -864,7 +895,7 @@
     </p:spTree>
     <p:extLst>
       <p:ext uri="{BB962C8B-B14F-4D97-AF65-F5344CB8AC3E}">
-        <p14:creationId xmlns:p14="http://schemas.microsoft.com/office/powerpoint/2010/main" val="3334991167"/>
+        <p14:creationId xmlns:p14="http://schemas.microsoft.com/office/powerpoint/2010/main" val="2455803527"/>
       </p:ext>
     </p:extLst>
   </p:cSld>
@@ -916,7 +947,7 @@
           </a:lstStyle>
           <a:p>
             <a:r>
-              <a:rPr lang="en-US" altLang="zh-TW" smtClean="0"/>
+              <a:rPr lang="en-US" altLang="zh-TW"/>
               <a:t>Click to edit Master title style</a:t>
             </a:r>
             <a:endParaRPr lang="zh-TW" altLang="en-US"/>
@@ -1036,8 +1067,8 @@
           <a:p>
             <a:pPr lvl="0"/>
             <a:r>
-              <a:rPr lang="en-US" altLang="zh-TW" smtClean="0"/>
-              <a:t>Edit Master text styles</a:t>
+              <a:rPr lang="en-US" altLang="zh-TW"/>
+              <a:t>Click to edit Master text styles</a:t>
             </a:r>
           </a:p>
         </p:txBody>
@@ -1057,9 +1088,10 @@
           <a:bodyPr/>
           <a:lstStyle/>
           <a:p>
-            <a:fld id="{C68E7312-D940-4E61-9982-FF60E332752E}" type="datetimeFigureOut">
+            <a:fld id="{2F1EBCE9-37A8-40F2-A48F-C8A470C397B9}" type="datetimeFigureOut">
               <a:rPr lang="vi-VN" smtClean="0"/>
-              <a:t>06/02/2020</a:t>
+              <a:pPr/>
+              <a:t>26/01/2025</a:t>
             </a:fld>
             <a:endParaRPr lang="vi-VN"/>
           </a:p>
@@ -1099,8 +1131,9 @@
           <a:bodyPr/>
           <a:lstStyle/>
           <a:p>
-            <a:fld id="{FDF2C4F2-6C2D-4D6F-9A8A-9C9DE1F34AA6}" type="slidenum">
+            <a:fld id="{13F61CAC-7311-4408-9799-651F6CBD428F}" type="slidenum">
               <a:rPr lang="vi-VN" smtClean="0"/>
+              <a:pPr/>
               <a:t>‹#›</a:t>
             </a:fld>
             <a:endParaRPr lang="vi-VN"/>
@@ -1110,7 +1143,7 @@
     </p:spTree>
     <p:extLst>
       <p:ext uri="{BB962C8B-B14F-4D97-AF65-F5344CB8AC3E}">
-        <p14:creationId xmlns:p14="http://schemas.microsoft.com/office/powerpoint/2010/main" val="3968333877"/>
+        <p14:creationId xmlns:p14="http://schemas.microsoft.com/office/powerpoint/2010/main" val="1570315677"/>
       </p:ext>
     </p:extLst>
   </p:cSld>
@@ -1153,7 +1186,7 @@
           <a:lstStyle/>
           <a:p>
             <a:r>
-              <a:rPr lang="en-US" altLang="zh-TW" smtClean="0"/>
+              <a:rPr lang="en-US" altLang="zh-TW"/>
               <a:t>Click to edit Master title style</a:t>
             </a:r>
             <a:endParaRPr lang="zh-TW" altLang="en-US"/>
@@ -1210,35 +1243,35 @@
           <a:p>
             <a:pPr lvl="0"/>
             <a:r>
-              <a:rPr lang="en-US" altLang="zh-TW" smtClean="0"/>
-              <a:t>Edit Master text styles</a:t>
+              <a:rPr lang="en-US" altLang="zh-TW"/>
+              <a:t>Click to edit Master text styles</a:t>
             </a:r>
           </a:p>
           <a:p>
             <a:pPr lvl="1"/>
             <a:r>
-              <a:rPr lang="en-US" altLang="zh-TW" smtClean="0"/>
+              <a:rPr lang="en-US" altLang="zh-TW"/>
               <a:t>Second level</a:t>
             </a:r>
           </a:p>
           <a:p>
             <a:pPr lvl="2"/>
             <a:r>
-              <a:rPr lang="en-US" altLang="zh-TW" smtClean="0"/>
+              <a:rPr lang="en-US" altLang="zh-TW"/>
               <a:t>Third level</a:t>
             </a:r>
           </a:p>
           <a:p>
             <a:pPr lvl="3"/>
             <a:r>
-              <a:rPr lang="en-US" altLang="zh-TW" smtClean="0"/>
+              <a:rPr lang="en-US" altLang="zh-TW"/>
               <a:t>Fourth level</a:t>
             </a:r>
           </a:p>
           <a:p>
             <a:pPr lvl="4"/>
             <a:r>
-              <a:rPr lang="en-US" altLang="zh-TW" smtClean="0"/>
+              <a:rPr lang="en-US" altLang="zh-TW"/>
               <a:t>Fifth level</a:t>
             </a:r>
             <a:endParaRPr lang="zh-TW" altLang="en-US"/>
@@ -1295,35 +1328,35 @@
           <a:p>
             <a:pPr lvl="0"/>
             <a:r>
-              <a:rPr lang="en-US" altLang="zh-TW" smtClean="0"/>
-              <a:t>Edit Master text styles</a:t>
+              <a:rPr lang="en-US" altLang="zh-TW"/>
+              <a:t>Click to edit Master text styles</a:t>
             </a:r>
           </a:p>
           <a:p>
             <a:pPr lvl="1"/>
             <a:r>
-              <a:rPr lang="en-US" altLang="zh-TW" smtClean="0"/>
+              <a:rPr lang="en-US" altLang="zh-TW"/>
               <a:t>Second level</a:t>
             </a:r>
           </a:p>
           <a:p>
             <a:pPr lvl="2"/>
             <a:r>
-              <a:rPr lang="en-US" altLang="zh-TW" smtClean="0"/>
+              <a:rPr lang="en-US" altLang="zh-TW"/>
               <a:t>Third level</a:t>
             </a:r>
           </a:p>
           <a:p>
             <a:pPr lvl="3"/>
             <a:r>
-              <a:rPr lang="en-US" altLang="zh-TW" smtClean="0"/>
+              <a:rPr lang="en-US" altLang="zh-TW"/>
               <a:t>Fourth level</a:t>
             </a:r>
           </a:p>
           <a:p>
             <a:pPr lvl="4"/>
             <a:r>
-              <a:rPr lang="en-US" altLang="zh-TW" smtClean="0"/>
+              <a:rPr lang="en-US" altLang="zh-TW"/>
               <a:t>Fifth level</a:t>
             </a:r>
             <a:endParaRPr lang="zh-TW" altLang="en-US"/>
@@ -1345,9 +1378,10 @@
           <a:bodyPr/>
           <a:lstStyle/>
           <a:p>
-            <a:fld id="{C68E7312-D940-4E61-9982-FF60E332752E}" type="datetimeFigureOut">
+            <a:fld id="{2F1EBCE9-37A8-40F2-A48F-C8A470C397B9}" type="datetimeFigureOut">
               <a:rPr lang="vi-VN" smtClean="0"/>
-              <a:t>06/02/2020</a:t>
+              <a:pPr/>
+              <a:t>26/01/2025</a:t>
             </a:fld>
             <a:endParaRPr lang="vi-VN"/>
           </a:p>
@@ -1387,8 +1421,9 @@
           <a:bodyPr/>
           <a:lstStyle/>
           <a:p>
-            <a:fld id="{FDF2C4F2-6C2D-4D6F-9A8A-9C9DE1F34AA6}" type="slidenum">
+            <a:fld id="{13F61CAC-7311-4408-9799-651F6CBD428F}" type="slidenum">
               <a:rPr lang="vi-VN" smtClean="0"/>
+              <a:pPr/>
               <a:t>‹#›</a:t>
             </a:fld>
             <a:endParaRPr lang="vi-VN"/>
@@ -1398,7 +1433,7 @@
     </p:spTree>
     <p:extLst>
       <p:ext uri="{BB962C8B-B14F-4D97-AF65-F5344CB8AC3E}">
-        <p14:creationId xmlns:p14="http://schemas.microsoft.com/office/powerpoint/2010/main" val="3811821640"/>
+        <p14:creationId xmlns:p14="http://schemas.microsoft.com/office/powerpoint/2010/main" val="2524055416"/>
       </p:ext>
     </p:extLst>
   </p:cSld>
@@ -1445,7 +1480,7 @@
           </a:lstStyle>
           <a:p>
             <a:r>
-              <a:rPr lang="en-US" altLang="zh-TW" smtClean="0"/>
+              <a:rPr lang="en-US" altLang="zh-TW"/>
               <a:t>Click to edit Master title style</a:t>
             </a:r>
             <a:endParaRPr lang="zh-TW" altLang="en-US"/>
@@ -1511,8 +1546,8 @@
           <a:p>
             <a:pPr lvl="0"/>
             <a:r>
-              <a:rPr lang="en-US" altLang="zh-TW" smtClean="0"/>
-              <a:t>Edit Master text styles</a:t>
+              <a:rPr lang="en-US" altLang="zh-TW"/>
+              <a:t>Click to edit Master text styles</a:t>
             </a:r>
           </a:p>
         </p:txBody>
@@ -1567,35 +1602,35 @@
           <a:p>
             <a:pPr lvl="0"/>
             <a:r>
-              <a:rPr lang="en-US" altLang="zh-TW" smtClean="0"/>
-              <a:t>Edit Master text styles</a:t>
+              <a:rPr lang="en-US" altLang="zh-TW"/>
+              <a:t>Click to edit Master text styles</a:t>
             </a:r>
           </a:p>
           <a:p>
             <a:pPr lvl="1"/>
             <a:r>
-              <a:rPr lang="en-US" altLang="zh-TW" smtClean="0"/>
+              <a:rPr lang="en-US" altLang="zh-TW"/>
               <a:t>Second level</a:t>
             </a:r>
           </a:p>
           <a:p>
             <a:pPr lvl="2"/>
             <a:r>
-              <a:rPr lang="en-US" altLang="zh-TW" smtClean="0"/>
+              <a:rPr lang="en-US" altLang="zh-TW"/>
               <a:t>Third level</a:t>
             </a:r>
           </a:p>
           <a:p>
             <a:pPr lvl="3"/>
             <a:r>
-              <a:rPr lang="en-US" altLang="zh-TW" smtClean="0"/>
+              <a:rPr lang="en-US" altLang="zh-TW"/>
               <a:t>Fourth level</a:t>
             </a:r>
           </a:p>
           <a:p>
             <a:pPr lvl="4"/>
             <a:r>
-              <a:rPr lang="en-US" altLang="zh-TW" smtClean="0"/>
+              <a:rPr lang="en-US" altLang="zh-TW"/>
               <a:t>Fifth level</a:t>
             </a:r>
             <a:endParaRPr lang="zh-TW" altLang="en-US"/>
@@ -1614,7 +1649,7 @@
         </p:nvSpPr>
         <p:spPr>
           <a:xfrm>
-            <a:off x="6193369" y="1535113"/>
+            <a:off x="6193372" y="1535113"/>
             <a:ext cx="5389033" cy="639763"/>
           </a:xfrm>
         </p:spPr>
@@ -1661,8 +1696,8 @@
           <a:p>
             <a:pPr lvl="0"/>
             <a:r>
-              <a:rPr lang="en-US" altLang="zh-TW" smtClean="0"/>
-              <a:t>Edit Master text styles</a:t>
+              <a:rPr lang="en-US" altLang="zh-TW"/>
+              <a:t>Click to edit Master text styles</a:t>
             </a:r>
           </a:p>
         </p:txBody>
@@ -1679,7 +1714,7 @@
         </p:nvSpPr>
         <p:spPr>
           <a:xfrm>
-            <a:off x="6193369" y="2174875"/>
+            <a:off x="6193372" y="2174875"/>
             <a:ext cx="5389033" cy="3951288"/>
           </a:xfrm>
         </p:spPr>
@@ -1717,35 +1752,35 @@
           <a:p>
             <a:pPr lvl="0"/>
             <a:r>
-              <a:rPr lang="en-US" altLang="zh-TW" smtClean="0"/>
-              <a:t>Edit Master text styles</a:t>
+              <a:rPr lang="en-US" altLang="zh-TW"/>
+              <a:t>Click to edit Master text styles</a:t>
             </a:r>
           </a:p>
           <a:p>
             <a:pPr lvl="1"/>
             <a:r>
-              <a:rPr lang="en-US" altLang="zh-TW" smtClean="0"/>
+              <a:rPr lang="en-US" altLang="zh-TW"/>
               <a:t>Second level</a:t>
             </a:r>
           </a:p>
           <a:p>
             <a:pPr lvl="2"/>
             <a:r>
-              <a:rPr lang="en-US" altLang="zh-TW" smtClean="0"/>
+              <a:rPr lang="en-US" altLang="zh-TW"/>
               <a:t>Third level</a:t>
             </a:r>
           </a:p>
           <a:p>
             <a:pPr lvl="3"/>
             <a:r>
-              <a:rPr lang="en-US" altLang="zh-TW" smtClean="0"/>
+              <a:rPr lang="en-US" altLang="zh-TW"/>
               <a:t>Fourth level</a:t>
             </a:r>
           </a:p>
           <a:p>
             <a:pPr lvl="4"/>
             <a:r>
-              <a:rPr lang="en-US" altLang="zh-TW" smtClean="0"/>
+              <a:rPr lang="en-US" altLang="zh-TW"/>
               <a:t>Fifth level</a:t>
             </a:r>
             <a:endParaRPr lang="zh-TW" altLang="en-US"/>
@@ -1767,9 +1802,10 @@
           <a:bodyPr/>
           <a:lstStyle/>
           <a:p>
-            <a:fld id="{C68E7312-D940-4E61-9982-FF60E332752E}" type="datetimeFigureOut">
+            <a:fld id="{2F1EBCE9-37A8-40F2-A48F-C8A470C397B9}" type="datetimeFigureOut">
               <a:rPr lang="vi-VN" smtClean="0"/>
-              <a:t>06/02/2020</a:t>
+              <a:pPr/>
+              <a:t>26/01/2025</a:t>
             </a:fld>
             <a:endParaRPr lang="vi-VN"/>
           </a:p>
@@ -1809,8 +1845,9 @@
           <a:bodyPr/>
           <a:lstStyle/>
           <a:p>
-            <a:fld id="{FDF2C4F2-6C2D-4D6F-9A8A-9C9DE1F34AA6}" type="slidenum">
+            <a:fld id="{13F61CAC-7311-4408-9799-651F6CBD428F}" type="slidenum">
               <a:rPr lang="vi-VN" smtClean="0"/>
+              <a:pPr/>
               <a:t>‹#›</a:t>
             </a:fld>
             <a:endParaRPr lang="vi-VN"/>
@@ -1820,7 +1857,7 @@
     </p:spTree>
     <p:extLst>
       <p:ext uri="{BB962C8B-B14F-4D97-AF65-F5344CB8AC3E}">
-        <p14:creationId xmlns:p14="http://schemas.microsoft.com/office/powerpoint/2010/main" val="2060217980"/>
+        <p14:creationId xmlns:p14="http://schemas.microsoft.com/office/powerpoint/2010/main" val="4261133299"/>
       </p:ext>
     </p:extLst>
   </p:cSld>
@@ -1863,7 +1900,7 @@
           <a:lstStyle/>
           <a:p>
             <a:r>
-              <a:rPr lang="en-US" altLang="zh-TW" smtClean="0"/>
+              <a:rPr lang="en-US" altLang="zh-TW"/>
               <a:t>Click to edit Master title style</a:t>
             </a:r>
             <a:endParaRPr lang="zh-TW" altLang="en-US"/>
@@ -1885,9 +1922,10 @@
           <a:bodyPr/>
           <a:lstStyle/>
           <a:p>
-            <a:fld id="{C68E7312-D940-4E61-9982-FF60E332752E}" type="datetimeFigureOut">
+            <a:fld id="{2F1EBCE9-37A8-40F2-A48F-C8A470C397B9}" type="datetimeFigureOut">
               <a:rPr lang="vi-VN" smtClean="0"/>
-              <a:t>06/02/2020</a:t>
+              <a:pPr/>
+              <a:t>26/01/2025</a:t>
             </a:fld>
             <a:endParaRPr lang="vi-VN"/>
           </a:p>
@@ -1927,8 +1965,9 @@
           <a:bodyPr/>
           <a:lstStyle/>
           <a:p>
-            <a:fld id="{FDF2C4F2-6C2D-4D6F-9A8A-9C9DE1F34AA6}" type="slidenum">
+            <a:fld id="{13F61CAC-7311-4408-9799-651F6CBD428F}" type="slidenum">
               <a:rPr lang="vi-VN" smtClean="0"/>
+              <a:pPr/>
               <a:t>‹#›</a:t>
             </a:fld>
             <a:endParaRPr lang="vi-VN"/>
@@ -1938,7 +1977,7 @@
     </p:spTree>
     <p:extLst>
       <p:ext uri="{BB962C8B-B14F-4D97-AF65-F5344CB8AC3E}">
-        <p14:creationId xmlns:p14="http://schemas.microsoft.com/office/powerpoint/2010/main" val="1756070012"/>
+        <p14:creationId xmlns:p14="http://schemas.microsoft.com/office/powerpoint/2010/main" val="3450452788"/>
       </p:ext>
     </p:extLst>
   </p:cSld>
@@ -1980,9 +2019,10 @@
           <a:bodyPr/>
           <a:lstStyle/>
           <a:p>
-            <a:fld id="{C68E7312-D940-4E61-9982-FF60E332752E}" type="datetimeFigureOut">
+            <a:fld id="{2F1EBCE9-37A8-40F2-A48F-C8A470C397B9}" type="datetimeFigureOut">
               <a:rPr lang="vi-VN" smtClean="0"/>
-              <a:t>06/02/2020</a:t>
+              <a:pPr/>
+              <a:t>26/01/2025</a:t>
             </a:fld>
             <a:endParaRPr lang="vi-VN"/>
           </a:p>
@@ -2022,8 +2062,9 @@
           <a:bodyPr/>
           <a:lstStyle/>
           <a:p>
-            <a:fld id="{FDF2C4F2-6C2D-4D6F-9A8A-9C9DE1F34AA6}" type="slidenum">
+            <a:fld id="{13F61CAC-7311-4408-9799-651F6CBD428F}" type="slidenum">
               <a:rPr lang="vi-VN" smtClean="0"/>
+              <a:pPr/>
               <a:t>‹#›</a:t>
             </a:fld>
             <a:endParaRPr lang="vi-VN"/>
@@ -2033,7 +2074,7 @@
     </p:spTree>
     <p:extLst>
       <p:ext uri="{BB962C8B-B14F-4D97-AF65-F5344CB8AC3E}">
-        <p14:creationId xmlns:p14="http://schemas.microsoft.com/office/powerpoint/2010/main" val="2170532931"/>
+        <p14:creationId xmlns:p14="http://schemas.microsoft.com/office/powerpoint/2010/main" val="4244361572"/>
       </p:ext>
     </p:extLst>
   </p:cSld>
@@ -2072,7 +2113,7 @@
         </p:nvSpPr>
         <p:spPr>
           <a:xfrm>
-            <a:off x="609602" y="273049"/>
+            <a:off x="609603" y="273049"/>
             <a:ext cx="4011084" cy="1162051"/>
           </a:xfrm>
         </p:spPr>
@@ -2085,7 +2126,7 @@
           </a:lstStyle>
           <a:p>
             <a:r>
-              <a:rPr lang="en-US" altLang="zh-TW" smtClean="0"/>
+              <a:rPr lang="en-US" altLang="zh-TW"/>
               <a:t>Click to edit Master title style</a:t>
             </a:r>
             <a:endParaRPr lang="zh-TW" altLang="en-US"/>
@@ -2104,7 +2145,7 @@
         </p:nvSpPr>
         <p:spPr>
           <a:xfrm>
-            <a:off x="4766733" y="273052"/>
+            <a:off x="4766733" y="273053"/>
             <a:ext cx="6815667" cy="5853113"/>
           </a:xfrm>
         </p:spPr>
@@ -2142,35 +2183,35 @@
           <a:p>
             <a:pPr lvl="0"/>
             <a:r>
-              <a:rPr lang="en-US" altLang="zh-TW" smtClean="0"/>
-              <a:t>Edit Master text styles</a:t>
+              <a:rPr lang="en-US" altLang="zh-TW"/>
+              <a:t>Click to edit Master text styles</a:t>
             </a:r>
           </a:p>
           <a:p>
             <a:pPr lvl="1"/>
             <a:r>
-              <a:rPr lang="en-US" altLang="zh-TW" smtClean="0"/>
+              <a:rPr lang="en-US" altLang="zh-TW"/>
               <a:t>Second level</a:t>
             </a:r>
           </a:p>
           <a:p>
             <a:pPr lvl="2"/>
             <a:r>
-              <a:rPr lang="en-US" altLang="zh-TW" smtClean="0"/>
+              <a:rPr lang="en-US" altLang="zh-TW"/>
               <a:t>Third level</a:t>
             </a:r>
           </a:p>
           <a:p>
             <a:pPr lvl="3"/>
             <a:r>
-              <a:rPr lang="en-US" altLang="zh-TW" smtClean="0"/>
+              <a:rPr lang="en-US" altLang="zh-TW"/>
               <a:t>Fourth level</a:t>
             </a:r>
           </a:p>
           <a:p>
             <a:pPr lvl="4"/>
             <a:r>
-              <a:rPr lang="en-US" altLang="zh-TW" smtClean="0"/>
+              <a:rPr lang="en-US" altLang="zh-TW"/>
               <a:t>Fifth level</a:t>
             </a:r>
             <a:endParaRPr lang="zh-TW" altLang="en-US"/>
@@ -2189,7 +2230,7 @@
         </p:nvSpPr>
         <p:spPr>
           <a:xfrm>
-            <a:off x="609602" y="1435102"/>
+            <a:off x="609603" y="1435103"/>
             <a:ext cx="4011084" cy="4691063"/>
           </a:xfrm>
         </p:spPr>
@@ -2236,8 +2277,8 @@
           <a:p>
             <a:pPr lvl="0"/>
             <a:r>
-              <a:rPr lang="en-US" altLang="zh-TW" smtClean="0"/>
-              <a:t>Edit Master text styles</a:t>
+              <a:rPr lang="en-US" altLang="zh-TW"/>
+              <a:t>Click to edit Master text styles</a:t>
             </a:r>
           </a:p>
         </p:txBody>
@@ -2257,9 +2298,10 @@
           <a:bodyPr/>
           <a:lstStyle/>
           <a:p>
-            <a:fld id="{C68E7312-D940-4E61-9982-FF60E332752E}" type="datetimeFigureOut">
+            <a:fld id="{2F1EBCE9-37A8-40F2-A48F-C8A470C397B9}" type="datetimeFigureOut">
               <a:rPr lang="vi-VN" smtClean="0"/>
-              <a:t>06/02/2020</a:t>
+              <a:pPr/>
+              <a:t>26/01/2025</a:t>
             </a:fld>
             <a:endParaRPr lang="vi-VN"/>
           </a:p>
@@ -2299,8 +2341,9 @@
           <a:bodyPr/>
           <a:lstStyle/>
           <a:p>
-            <a:fld id="{FDF2C4F2-6C2D-4D6F-9A8A-9C9DE1F34AA6}" type="slidenum">
+            <a:fld id="{13F61CAC-7311-4408-9799-651F6CBD428F}" type="slidenum">
               <a:rPr lang="vi-VN" smtClean="0"/>
+              <a:pPr/>
               <a:t>‹#›</a:t>
             </a:fld>
             <a:endParaRPr lang="vi-VN"/>
@@ -2310,7 +2353,7 @@
     </p:spTree>
     <p:extLst>
       <p:ext uri="{BB962C8B-B14F-4D97-AF65-F5344CB8AC3E}">
-        <p14:creationId xmlns:p14="http://schemas.microsoft.com/office/powerpoint/2010/main" val="3592487495"/>
+        <p14:creationId xmlns:p14="http://schemas.microsoft.com/office/powerpoint/2010/main" val="3830049333"/>
       </p:ext>
     </p:extLst>
   </p:cSld>
@@ -2349,7 +2392,7 @@
         </p:nvSpPr>
         <p:spPr>
           <a:xfrm>
-            <a:off x="2389717" y="4800600"/>
+            <a:off x="2389717" y="4800601"/>
             <a:ext cx="7315200" cy="566739"/>
           </a:xfrm>
         </p:spPr>
@@ -2362,7 +2405,7 @@
           </a:lstStyle>
           <a:p>
             <a:r>
-              <a:rPr lang="en-US" altLang="zh-TW" smtClean="0"/>
+              <a:rPr lang="en-US" altLang="zh-TW"/>
               <a:t>Click to edit Master title style</a:t>
             </a:r>
             <a:endParaRPr lang="zh-TW" altLang="en-US"/>
@@ -2427,7 +2470,7 @@
           </a:lstStyle>
           <a:p>
             <a:r>
-              <a:rPr lang="en-US" altLang="zh-TW" smtClean="0"/>
+              <a:rPr lang="en-US" altLang="zh-TW"/>
               <a:t>Click icon to add picture</a:t>
             </a:r>
             <a:endParaRPr lang="zh-TW" altLang="en-US"/>
@@ -2446,7 +2489,7 @@
         </p:nvSpPr>
         <p:spPr>
           <a:xfrm>
-            <a:off x="2389717" y="5367338"/>
+            <a:off x="2389717" y="5367339"/>
             <a:ext cx="7315200" cy="804863"/>
           </a:xfrm>
         </p:spPr>
@@ -2493,8 +2536,8 @@
           <a:p>
             <a:pPr lvl="0"/>
             <a:r>
-              <a:rPr lang="en-US" altLang="zh-TW" smtClean="0"/>
-              <a:t>Edit Master text styles</a:t>
+              <a:rPr lang="en-US" altLang="zh-TW"/>
+              <a:t>Click to edit Master text styles</a:t>
             </a:r>
           </a:p>
         </p:txBody>
@@ -2514,9 +2557,10 @@
           <a:bodyPr/>
           <a:lstStyle/>
           <a:p>
-            <a:fld id="{C68E7312-D940-4E61-9982-FF60E332752E}" type="datetimeFigureOut">
+            <a:fld id="{2F1EBCE9-37A8-40F2-A48F-C8A470C397B9}" type="datetimeFigureOut">
               <a:rPr lang="vi-VN" smtClean="0"/>
-              <a:t>06/02/2020</a:t>
+              <a:pPr/>
+              <a:t>26/01/2025</a:t>
             </a:fld>
             <a:endParaRPr lang="vi-VN"/>
           </a:p>
@@ -2556,8 +2600,9 @@
           <a:bodyPr/>
           <a:lstStyle/>
           <a:p>
-            <a:fld id="{FDF2C4F2-6C2D-4D6F-9A8A-9C9DE1F34AA6}" type="slidenum">
+            <a:fld id="{13F61CAC-7311-4408-9799-651F6CBD428F}" type="slidenum">
               <a:rPr lang="vi-VN" smtClean="0"/>
+              <a:pPr/>
               <a:t>‹#›</a:t>
             </a:fld>
             <a:endParaRPr lang="vi-VN"/>
@@ -2567,7 +2612,7 @@
     </p:spTree>
     <p:extLst>
       <p:ext uri="{BB962C8B-B14F-4D97-AF65-F5344CB8AC3E}">
-        <p14:creationId xmlns:p14="http://schemas.microsoft.com/office/powerpoint/2010/main" val="1938256709"/>
+        <p14:creationId xmlns:p14="http://schemas.microsoft.com/office/powerpoint/2010/main" val="480144567"/>
       </p:ext>
     </p:extLst>
   </p:cSld>
@@ -2616,7 +2661,7 @@
         </p:nvSpPr>
         <p:spPr>
           <a:xfrm>
-            <a:off x="609600" y="274639"/>
+            <a:off x="609600" y="274637"/>
             <a:ext cx="10972800" cy="1143000"/>
           </a:xfrm>
           <a:prstGeom prst="rect">
@@ -2630,10 +2675,9 @@
           <a:lstStyle/>
           <a:p>
             <a:r>
-              <a:rPr lang="zh-TW" altLang="en-US" smtClean="0"/>
+              <a:rPr lang="zh-TW" altLang="en-US"/>
               <a:t>按一下以編輯母片標題樣式</a:t>
             </a:r>
-            <a:endParaRPr lang="zh-TW" altLang="en-US"/>
           </a:p>
         </p:txBody>
       </p:sp>
@@ -2664,38 +2708,37 @@
           <a:p>
             <a:pPr lvl="0"/>
             <a:r>
-              <a:rPr lang="zh-TW" altLang="en-US" smtClean="0"/>
+              <a:rPr lang="zh-TW" altLang="en-US"/>
               <a:t>按一下以編輯母片文字樣式</a:t>
             </a:r>
           </a:p>
           <a:p>
             <a:pPr lvl="1"/>
             <a:r>
-              <a:rPr lang="zh-TW" altLang="en-US" smtClean="0"/>
+              <a:rPr lang="zh-TW" altLang="en-US"/>
               <a:t>第二層</a:t>
             </a:r>
           </a:p>
           <a:p>
             <a:pPr lvl="2"/>
             <a:r>
-              <a:rPr lang="zh-TW" altLang="en-US" smtClean="0"/>
+              <a:rPr lang="zh-TW" altLang="en-US"/>
               <a:t>第三層</a:t>
             </a:r>
           </a:p>
           <a:p>
             <a:pPr lvl="3"/>
             <a:r>
-              <a:rPr lang="zh-TW" altLang="en-US" smtClean="0"/>
+              <a:rPr lang="zh-TW" altLang="en-US"/>
               <a:t>第四層</a:t>
             </a:r>
           </a:p>
           <a:p>
             <a:pPr lvl="4"/>
             <a:r>
-              <a:rPr lang="zh-TW" altLang="en-US" smtClean="0"/>
+              <a:rPr lang="zh-TW" altLang="en-US"/>
               <a:t>第五層</a:t>
             </a:r>
-            <a:endParaRPr lang="zh-TW" altLang="en-US"/>
           </a:p>
         </p:txBody>
       </p:sp>
@@ -2711,7 +2754,7 @@
         </p:nvSpPr>
         <p:spPr>
           <a:xfrm>
-            <a:off x="609600" y="6356351"/>
+            <a:off x="609600" y="6356352"/>
             <a:ext cx="2844800" cy="365125"/>
           </a:xfrm>
           <a:prstGeom prst="rect">
@@ -2732,9 +2775,10 @@
             </a:lvl1pPr>
           </a:lstStyle>
           <a:p>
-            <a:fld id="{C68E7312-D940-4E61-9982-FF60E332752E}" type="datetimeFigureOut">
+            <a:fld id="{2F1EBCE9-37A8-40F2-A48F-C8A470C397B9}" type="datetimeFigureOut">
               <a:rPr lang="vi-VN" smtClean="0"/>
-              <a:t>06/02/2020</a:t>
+              <a:pPr/>
+              <a:t>26/01/2025</a:t>
             </a:fld>
             <a:endParaRPr lang="vi-VN"/>
           </a:p>
@@ -2752,7 +2796,7 @@
         </p:nvSpPr>
         <p:spPr>
           <a:xfrm>
-            <a:off x="4165600" y="6356351"/>
+            <a:off x="4165600" y="6356352"/>
             <a:ext cx="3860800" cy="365125"/>
           </a:xfrm>
           <a:prstGeom prst="rect">
@@ -2789,7 +2833,7 @@
         </p:nvSpPr>
         <p:spPr>
           <a:xfrm>
-            <a:off x="8737600" y="6356351"/>
+            <a:off x="8737600" y="6356352"/>
             <a:ext cx="2844800" cy="365125"/>
           </a:xfrm>
           <a:prstGeom prst="rect">
@@ -2810,8 +2854,9 @@
             </a:lvl1pPr>
           </a:lstStyle>
           <a:p>
-            <a:fld id="{FDF2C4F2-6C2D-4D6F-9A8A-9C9DE1F34AA6}" type="slidenum">
+            <a:fld id="{13F61CAC-7311-4408-9799-651F6CBD428F}" type="slidenum">
               <a:rPr lang="vi-VN" smtClean="0"/>
+              <a:pPr/>
               <a:t>‹#›</a:t>
             </a:fld>
             <a:endParaRPr lang="vi-VN"/>
@@ -2821,7 +2866,7 @@
     </p:spTree>
     <p:extLst>
       <p:ext uri="{BB962C8B-B14F-4D97-AF65-F5344CB8AC3E}">
-        <p14:creationId xmlns:p14="http://schemas.microsoft.com/office/powerpoint/2010/main" val="3027406203"/>
+        <p14:creationId xmlns:p14="http://schemas.microsoft.com/office/powerpoint/2010/main" val="2158853954"/>
       </p:ext>
     </p:extLst>
   </p:cSld>
@@ -2861,7 +2906,7 @@
         <a:spcBef>
           <a:spcPct val="20000"/>
         </a:spcBef>
-        <a:buFont typeface="Arial" pitchFamily="34" charset="0"/>
+        <a:buFont typeface="Arial" panose="02080604020202020204" pitchFamily="34" charset="0"/>
         <a:buChar char="•"/>
         <a:defRPr sz="4267" kern="1200">
           <a:solidFill>
@@ -2876,7 +2921,7 @@
         <a:spcBef>
           <a:spcPct val="20000"/>
         </a:spcBef>
-        <a:buFont typeface="Arial" pitchFamily="34" charset="0"/>
+        <a:buFont typeface="Arial" panose="02080604020202020204" pitchFamily="34" charset="0"/>
         <a:buChar char="–"/>
         <a:defRPr sz="3733" kern="1200">
           <a:solidFill>
@@ -2891,7 +2936,7 @@
         <a:spcBef>
           <a:spcPct val="20000"/>
         </a:spcBef>
-        <a:buFont typeface="Arial" pitchFamily="34" charset="0"/>
+        <a:buFont typeface="Arial" panose="02080604020202020204" pitchFamily="34" charset="0"/>
         <a:buChar char="•"/>
         <a:defRPr sz="3200" kern="1200">
           <a:solidFill>
@@ -2906,7 +2951,7 @@
         <a:spcBef>
           <a:spcPct val="20000"/>
         </a:spcBef>
-        <a:buFont typeface="Arial" pitchFamily="34" charset="0"/>
+        <a:buFont typeface="Arial" panose="02080604020202020204" pitchFamily="34" charset="0"/>
         <a:buChar char="–"/>
         <a:defRPr sz="2667" kern="1200">
           <a:solidFill>
@@ -2921,7 +2966,7 @@
         <a:spcBef>
           <a:spcPct val="20000"/>
         </a:spcBef>
-        <a:buFont typeface="Arial" pitchFamily="34" charset="0"/>
+        <a:buFont typeface="Arial" panose="02080604020202020204" pitchFamily="34" charset="0"/>
         <a:buChar char="»"/>
         <a:defRPr sz="2667" kern="1200">
           <a:solidFill>
@@ -2936,7 +2981,7 @@
         <a:spcBef>
           <a:spcPct val="20000"/>
         </a:spcBef>
-        <a:buFont typeface="Arial" pitchFamily="34" charset="0"/>
+        <a:buFont typeface="Arial" panose="02080604020202020204" pitchFamily="34" charset="0"/>
         <a:buChar char="•"/>
         <a:defRPr sz="2667" kern="1200">
           <a:solidFill>
@@ -2951,7 +2996,7 @@
         <a:spcBef>
           <a:spcPct val="20000"/>
         </a:spcBef>
-        <a:buFont typeface="Arial" pitchFamily="34" charset="0"/>
+        <a:buFont typeface="Arial" panose="02080604020202020204" pitchFamily="34" charset="0"/>
         <a:buChar char="•"/>
         <a:defRPr sz="2667" kern="1200">
           <a:solidFill>
@@ -2966,7 +3011,7 @@
         <a:spcBef>
           <a:spcPct val="20000"/>
         </a:spcBef>
-        <a:buFont typeface="Arial" pitchFamily="34" charset="0"/>
+        <a:buFont typeface="Arial" panose="02080604020202020204" pitchFamily="34" charset="0"/>
         <a:buChar char="•"/>
         <a:defRPr sz="2667" kern="1200">
           <a:solidFill>
@@ -2981,7 +3026,7 @@
         <a:spcBef>
           <a:spcPct val="20000"/>
         </a:spcBef>
-        <a:buFont typeface="Arial" pitchFamily="34" charset="0"/>
+        <a:buFont typeface="Arial" panose="02080604020202020204" pitchFamily="34" charset="0"/>
         <a:buChar char="•"/>
         <a:defRPr sz="2667" kern="1200">
           <a:solidFill>
@@ -3111,7 +3156,7 @@
       </p:grpSpPr>
       <p:sp>
         <p:nvSpPr>
-          <p:cNvPr id="2" name="Title 1"/>
+          <p:cNvPr id="4" name="標題 3"/>
           <p:cNvSpPr>
             <a:spLocks noGrp="1"/>
           </p:cNvSpPr>
@@ -3119,101 +3164,544 @@
             <p:ph type="title"/>
           </p:nvPr>
         </p:nvSpPr>
-        <p:spPr/>
+        <p:spPr>
+          <a:xfrm>
+            <a:off x="0" y="2625038"/>
+            <a:ext cx="12192000" cy="1143000"/>
+          </a:xfrm>
+        </p:spPr>
+        <p:txBody>
+          <a:bodyPr>
+            <a:noAutofit/>
+          </a:bodyPr>
+          <a:lstStyle/>
+          <a:p>
+            <a:r>
+              <a:rPr lang="vi-VN" sz="6400" b="1" i="1" dirty="0">
+                <a:solidFill>
+                  <a:srgbClr val="000066"/>
+                </a:solidFill>
+                <a:effectLst>
+                  <a:outerShdw blurRad="38100" dist="38100" dir="2700000" algn="tl">
+                    <a:srgbClr val="000000">
+                      <a:alpha val="43137"/>
+                    </a:srgbClr>
+                  </a:outerShdw>
+                </a:effectLst>
+                <a:ea typeface="微軟正黑體" pitchFamily="34" charset="-120"/>
+                <a:cs typeface="Arial" panose="020B0604020202020204" pitchFamily="34" charset="0"/>
+              </a:rPr>
+              <a:t>Xuân An Lành</a:t>
+            </a:r>
+            <a:endParaRPr lang="zh-TW" altLang="en-US" sz="6400" b="1" i="1" dirty="0">
+              <a:solidFill>
+                <a:srgbClr val="000066"/>
+              </a:solidFill>
+              <a:effectLst>
+                <a:outerShdw blurRad="38100" dist="38100" dir="2700000" algn="tl">
+                  <a:srgbClr val="000000">
+                    <a:alpha val="43137"/>
+                  </a:srgbClr>
+                </a:outerShdw>
+              </a:effectLst>
+              <a:ea typeface="微軟正黑體" pitchFamily="34" charset="-120"/>
+              <a:cs typeface="Arial" panose="020B0604020202020204" pitchFamily="34" charset="0"/>
+            </a:endParaRPr>
+          </a:p>
+        </p:txBody>
+      </p:sp>
+    </p:spTree>
+    <p:extLst>
+      <p:ext uri="{BB962C8B-B14F-4D97-AF65-F5344CB8AC3E}">
+        <p14:creationId xmlns:p14="http://schemas.microsoft.com/office/powerpoint/2010/main" val="587020125"/>
+      </p:ext>
+    </p:extLst>
+  </p:cSld>
+  <p:clrMapOvr>
+    <a:masterClrMapping/>
+  </p:clrMapOvr>
+</p:sld>
+</file>
+
+<file path=ppt/slides/slide10.xml><?xml version="1.0" encoding="utf-8"?>
+<p:sld xmlns:a="http://schemas.openxmlformats.org/drawingml/2006/main" xmlns:r="http://schemas.openxmlformats.org/officeDocument/2006/relationships" xmlns:p="http://schemas.openxmlformats.org/presentationml/2006/main">
+  <p:cSld>
+    <p:spTree>
+      <p:nvGrpSpPr>
+        <p:cNvPr id="1" name="">
+          <a:extLst>
+            <a:ext uri="{FF2B5EF4-FFF2-40B4-BE49-F238E27FC236}">
+              <a16:creationId xmlns:a16="http://schemas.microsoft.com/office/drawing/2014/main" id="{9C50574D-AE71-38FA-6051-B379C1A7A301}"/>
+            </a:ext>
+          </a:extLst>
+        </p:cNvPr>
+        <p:cNvGrpSpPr/>
+        <p:nvPr/>
+      </p:nvGrpSpPr>
+      <p:grpSpPr>
+        <a:xfrm>
+          <a:off x="0" y="0"/>
+          <a:ext cx="0" cy="0"/>
+          <a:chOff x="0" y="0"/>
+          <a:chExt cx="0" cy="0"/>
+        </a:xfrm>
+      </p:grpSpPr>
+      <p:sp>
+        <p:nvSpPr>
+          <p:cNvPr id="5" name="內容版面配置區 4">
+            <a:extLst>
+              <a:ext uri="{FF2B5EF4-FFF2-40B4-BE49-F238E27FC236}">
+                <a16:creationId xmlns:a16="http://schemas.microsoft.com/office/drawing/2014/main" id="{7AEDEAF3-CB18-BC32-1A42-628C7C44844A}"/>
+              </a:ext>
+            </a:extLst>
+          </p:cNvPr>
+          <p:cNvSpPr>
+            <a:spLocks noGrp="1"/>
+          </p:cNvSpPr>
+          <p:nvPr>
+            <p:ph idx="1"/>
+          </p:nvPr>
+        </p:nvSpPr>
+        <p:spPr>
+          <a:xfrm>
+            <a:off x="0" y="2084851"/>
+            <a:ext cx="12192000" cy="2404863"/>
+          </a:xfrm>
+        </p:spPr>
         <p:txBody>
           <a:bodyPr anchor="ctr">
             <a:normAutofit/>
           </a:bodyPr>
           <a:lstStyle/>
           <a:p>
-            <a:pPr algn="ctr"/>
-            <a:r>
-              <a:rPr lang="vi-VN" sz="4000" b="1" dirty="0">
-                <a:latin typeface="+mn-lt"/>
+            <a:pPr marL="0" indent="0" algn="ctr">
+              <a:buNone/>
+            </a:pPr>
+            <a:r>
+              <a:rPr lang="vi-VN" sz="4400" b="1" dirty="0">
+                <a:solidFill>
+                  <a:srgbClr val="000066"/>
+                </a:solidFill>
+                <a:latin typeface="Times New Roman" panose="02020603050405020304" pitchFamily="18" charset="0"/>
+                <a:cs typeface="Times New Roman" panose="02020603050405020304" pitchFamily="18" charset="0"/>
               </a:rPr>
-              <a:t>Xuân An Lành</a:t>
-            </a:r>
-          </a:p>
-        </p:txBody>
-      </p:sp>
-      <p:sp>
-        <p:nvSpPr>
-          <p:cNvPr id="3" name="Content Placeholder 2"/>
-          <p:cNvSpPr>
-            <a:spLocks noGrp="1"/>
-          </p:cNvSpPr>
-          <p:nvPr>
-            <p:ph idx="1"/>
-          </p:nvPr>
+              <a:t>Xuân xuân đã về thắm tươi trên đồng lúa vàng</a:t>
+            </a:r>
+          </a:p>
+          <a:p>
+            <a:pPr marL="0" indent="0" algn="ctr">
+              <a:buNone/>
+            </a:pPr>
+            <a:r>
+              <a:rPr lang="vi-VN" sz="4400" b="1" dirty="0">
+                <a:solidFill>
+                  <a:srgbClr val="000066"/>
+                </a:solidFill>
+                <a:latin typeface="Times New Roman" panose="02020603050405020304" pitchFamily="18" charset="0"/>
+                <a:cs typeface="Times New Roman" panose="02020603050405020304" pitchFamily="18" charset="0"/>
+              </a:rPr>
+              <a:t>Xuân xuân đã về trong lòng người con Chúa</a:t>
+            </a:r>
+          </a:p>
+        </p:txBody>
+      </p:sp>
+      <p:sp>
+        <p:nvSpPr>
+          <p:cNvPr id="3" name="TextBox 2">
+            <a:extLst>
+              <a:ext uri="{FF2B5EF4-FFF2-40B4-BE49-F238E27FC236}">
+                <a16:creationId xmlns:a16="http://schemas.microsoft.com/office/drawing/2014/main" id="{F63CBB2A-1C4A-9736-57AF-1D5445621E2E}"/>
+              </a:ext>
+            </a:extLst>
+          </p:cNvPr>
+          <p:cNvSpPr txBox="1"/>
+          <p:nvPr/>
         </p:nvSpPr>
         <p:spPr>
           <a:xfrm>
-            <a:off x="0" y="1825625"/>
-            <a:ext cx="12192000" cy="4351338"/>
+            <a:off x="0" y="5253203"/>
+            <a:ext cx="12192000" cy="584775"/>
           </a:xfrm>
+          <a:prstGeom prst="rect">
+            <a:avLst/>
+          </a:prstGeom>
+          <a:noFill/>
         </p:spPr>
         <p:txBody>
-          <a:bodyPr anchor="t">
-            <a:normAutofit/>
+          <a:bodyPr wrap="square" rtlCol="0">
+            <a:spAutoFit/>
           </a:bodyPr>
           <a:lstStyle/>
           <a:p>
-            <a:pPr marL="0" indent="0" algn="ctr">
-              <a:buNone/>
-            </a:pPr>
-            <a:r>
-              <a:rPr lang="vi-VN" sz="3600" b="1" dirty="0"/>
-              <a:t>Xuân xuân đã về thắm tươi trên đồng lúa </a:t>
-            </a:r>
-            <a:r>
-              <a:rPr lang="vi-VN" sz="3600" b="1" dirty="0" smtClean="0"/>
-              <a:t>vàng</a:t>
-            </a:r>
-            <a:endParaRPr lang="vi-VN" sz="3600" b="1" dirty="0"/>
-          </a:p>
-          <a:p>
-            <a:pPr marL="0" indent="0" algn="ctr">
-              <a:buNone/>
-            </a:pPr>
-            <a:r>
-              <a:rPr lang="vi-VN" sz="3600" b="1" dirty="0"/>
-              <a:t>Xuân xuân đã về huy hoàng ngàn tia </a:t>
-            </a:r>
-            <a:r>
-              <a:rPr lang="vi-VN" sz="3600" b="1" dirty="0" smtClean="0"/>
-              <a:t>nắng</a:t>
-            </a:r>
-            <a:endParaRPr lang="vi-VN" sz="3600" b="1" dirty="0"/>
-          </a:p>
-          <a:p>
-            <a:pPr marL="0" indent="0" algn="ctr">
-              <a:buNone/>
-            </a:pPr>
-            <a:r>
-              <a:rPr lang="vi-VN" sz="3600" b="1" dirty="0"/>
-              <a:t>Xuân xuân đã về ngát hương đêm mộng thanh </a:t>
-            </a:r>
-            <a:r>
-              <a:rPr lang="vi-VN" sz="3600" b="1" dirty="0" smtClean="0"/>
-              <a:t>bình</a:t>
-            </a:r>
-            <a:endParaRPr lang="vi-VN" sz="3600" b="1" dirty="0"/>
-          </a:p>
-          <a:p>
-            <a:pPr marL="0" indent="0" algn="ctr">
-              <a:buNone/>
-            </a:pPr>
-            <a:r>
-              <a:rPr lang="vi-VN" sz="3600" b="1" dirty="0"/>
-              <a:t>Xuân xuân đã về khắp nơi tràn ngập tiếng ca</a:t>
-            </a:r>
+            <a:pPr algn="ctr"/>
+            <a:r>
+              <a:rPr lang="en-US" sz="3200" b="1" dirty="0">
+                <a:solidFill>
+                  <a:srgbClr val="000066"/>
+                </a:solidFill>
+                <a:effectLst/>
+              </a:rPr>
+              <a:t>( 3 / 3 )</a:t>
+            </a:r>
+            <a:endParaRPr lang="vi-VN" sz="3200" b="1" dirty="0">
+              <a:solidFill>
+                <a:srgbClr val="000066"/>
+              </a:solidFill>
+              <a:effectLst/>
+            </a:endParaRPr>
           </a:p>
         </p:txBody>
       </p:sp>
     </p:spTree>
     <p:extLst>
       <p:ext uri="{BB962C8B-B14F-4D97-AF65-F5344CB8AC3E}">
-        <p14:creationId xmlns:p14="http://schemas.microsoft.com/office/powerpoint/2010/main" val="890169851"/>
+        <p14:creationId xmlns:p14="http://schemas.microsoft.com/office/powerpoint/2010/main" val="1536501125"/>
+      </p:ext>
+    </p:extLst>
+  </p:cSld>
+  <p:clrMapOvr>
+    <a:masterClrMapping/>
+  </p:clrMapOvr>
+</p:sld>
+</file>
+
+<file path=ppt/slides/slide11.xml><?xml version="1.0" encoding="utf-8"?>
+<p:sld xmlns:a="http://schemas.openxmlformats.org/drawingml/2006/main" xmlns:r="http://schemas.openxmlformats.org/officeDocument/2006/relationships" xmlns:p="http://schemas.openxmlformats.org/presentationml/2006/main">
+  <p:cSld>
+    <p:spTree>
+      <p:nvGrpSpPr>
+        <p:cNvPr id="1" name="">
+          <a:extLst>
+            <a:ext uri="{FF2B5EF4-FFF2-40B4-BE49-F238E27FC236}">
+              <a16:creationId xmlns:a16="http://schemas.microsoft.com/office/drawing/2014/main" id="{2F1F4F55-F269-BA08-C5D4-1219A618AB57}"/>
+            </a:ext>
+          </a:extLst>
+        </p:cNvPr>
+        <p:cNvGrpSpPr/>
+        <p:nvPr/>
+      </p:nvGrpSpPr>
+      <p:grpSpPr>
+        <a:xfrm>
+          <a:off x="0" y="0"/>
+          <a:ext cx="0" cy="0"/>
+          <a:chOff x="0" y="0"/>
+          <a:chExt cx="0" cy="0"/>
+        </a:xfrm>
+      </p:grpSpPr>
+      <p:sp>
+        <p:nvSpPr>
+          <p:cNvPr id="5" name="內容版面配置區 4">
+            <a:extLst>
+              <a:ext uri="{FF2B5EF4-FFF2-40B4-BE49-F238E27FC236}">
+                <a16:creationId xmlns:a16="http://schemas.microsoft.com/office/drawing/2014/main" id="{00CF0148-6891-CB45-578D-B407C7495D89}"/>
+              </a:ext>
+            </a:extLst>
+          </p:cNvPr>
+          <p:cNvSpPr>
+            <a:spLocks noGrp="1"/>
+          </p:cNvSpPr>
+          <p:nvPr>
+            <p:ph idx="1"/>
+          </p:nvPr>
+        </p:nvSpPr>
+        <p:spPr>
+          <a:xfrm>
+            <a:off x="0" y="2084851"/>
+            <a:ext cx="12192000" cy="2404863"/>
+          </a:xfrm>
+        </p:spPr>
+        <p:txBody>
+          <a:bodyPr anchor="ctr">
+            <a:normAutofit/>
+          </a:bodyPr>
+          <a:lstStyle/>
+          <a:p>
+            <a:pPr marL="0" indent="0" algn="ctr">
+              <a:buNone/>
+            </a:pPr>
+            <a:r>
+              <a:rPr lang="vi-VN" sz="4200" b="1" dirty="0">
+                <a:solidFill>
+                  <a:srgbClr val="000066"/>
+                </a:solidFill>
+                <a:latin typeface="Times New Roman" panose="02020603050405020304" pitchFamily="18" charset="0"/>
+                <a:cs typeface="Times New Roman" panose="02020603050405020304" pitchFamily="18" charset="0"/>
+              </a:rPr>
+              <a:t>Bao nhiêu ước nguyện thiết tha khi mùa xuân về</a:t>
+            </a:r>
+          </a:p>
+          <a:p>
+            <a:pPr marL="0" indent="0" algn="ctr">
+              <a:buNone/>
+            </a:pPr>
+            <a:r>
+              <a:rPr lang="vi-VN" sz="4200" b="1" dirty="0">
+                <a:solidFill>
+                  <a:srgbClr val="000066"/>
+                </a:solidFill>
+                <a:latin typeface="Times New Roman" panose="02020603050405020304" pitchFamily="18" charset="0"/>
+                <a:cs typeface="Times New Roman" panose="02020603050405020304" pitchFamily="18" charset="0"/>
+              </a:rPr>
+              <a:t>Mong nhân thế trọn ước mơ thanh bình ngát hương</a:t>
+            </a:r>
+          </a:p>
+        </p:txBody>
+      </p:sp>
+      <p:sp>
+        <p:nvSpPr>
+          <p:cNvPr id="3" name="TextBox 2">
+            <a:extLst>
+              <a:ext uri="{FF2B5EF4-FFF2-40B4-BE49-F238E27FC236}">
+                <a16:creationId xmlns:a16="http://schemas.microsoft.com/office/drawing/2014/main" id="{07C5BD0A-D1D6-AAA7-9FCC-2DE2629C38CE}"/>
+              </a:ext>
+            </a:extLst>
+          </p:cNvPr>
+          <p:cNvSpPr txBox="1"/>
+          <p:nvPr/>
+        </p:nvSpPr>
+        <p:spPr>
+          <a:xfrm>
+            <a:off x="0" y="5253203"/>
+            <a:ext cx="12192000" cy="584775"/>
+          </a:xfrm>
+          <a:prstGeom prst="rect">
+            <a:avLst/>
+          </a:prstGeom>
+          <a:noFill/>
+        </p:spPr>
+        <p:txBody>
+          <a:bodyPr wrap="square" rtlCol="0">
+            <a:spAutoFit/>
+          </a:bodyPr>
+          <a:lstStyle/>
+          <a:p>
+            <a:pPr algn="ctr"/>
+            <a:r>
+              <a:rPr lang="en-US" sz="3200" b="1" dirty="0">
+                <a:solidFill>
+                  <a:srgbClr val="000066"/>
+                </a:solidFill>
+                <a:effectLst/>
+              </a:rPr>
+              <a:t>( 3 / 3 )</a:t>
+            </a:r>
+            <a:endParaRPr lang="vi-VN" sz="3200" b="1" dirty="0">
+              <a:solidFill>
+                <a:srgbClr val="000066"/>
+              </a:solidFill>
+              <a:effectLst/>
+            </a:endParaRPr>
+          </a:p>
+        </p:txBody>
+      </p:sp>
+    </p:spTree>
+    <p:extLst>
+      <p:ext uri="{BB962C8B-B14F-4D97-AF65-F5344CB8AC3E}">
+        <p14:creationId xmlns:p14="http://schemas.microsoft.com/office/powerpoint/2010/main" val="1402405855"/>
+      </p:ext>
+    </p:extLst>
+  </p:cSld>
+  <p:clrMapOvr>
+    <a:masterClrMapping/>
+  </p:clrMapOvr>
+</p:sld>
+</file>
+
+<file path=ppt/slides/slide12.xml><?xml version="1.0" encoding="utf-8"?>
+<p:sld xmlns:a="http://schemas.openxmlformats.org/drawingml/2006/main" xmlns:r="http://schemas.openxmlformats.org/officeDocument/2006/relationships" xmlns:p="http://schemas.openxmlformats.org/presentationml/2006/main">
+  <p:cSld>
+    <p:spTree>
+      <p:nvGrpSpPr>
+        <p:cNvPr id="1" name="">
+          <a:extLst>
+            <a:ext uri="{FF2B5EF4-FFF2-40B4-BE49-F238E27FC236}">
+              <a16:creationId xmlns:a16="http://schemas.microsoft.com/office/drawing/2014/main" id="{AF760875-A24E-3067-0C33-1A03FDAE1889}"/>
+            </a:ext>
+          </a:extLst>
+        </p:cNvPr>
+        <p:cNvGrpSpPr/>
+        <p:nvPr/>
+      </p:nvGrpSpPr>
+      <p:grpSpPr>
+        <a:xfrm>
+          <a:off x="0" y="0"/>
+          <a:ext cx="0" cy="0"/>
+          <a:chOff x="0" y="0"/>
+          <a:chExt cx="0" cy="0"/>
+        </a:xfrm>
+      </p:grpSpPr>
+      <p:sp>
+        <p:nvSpPr>
+          <p:cNvPr id="5" name="內容版面配置區 4">
+            <a:extLst>
+              <a:ext uri="{FF2B5EF4-FFF2-40B4-BE49-F238E27FC236}">
+                <a16:creationId xmlns:a16="http://schemas.microsoft.com/office/drawing/2014/main" id="{1752CEA9-9A06-F00D-4E2C-3E6459927521}"/>
+              </a:ext>
+            </a:extLst>
+          </p:cNvPr>
+          <p:cNvSpPr>
+            <a:spLocks noGrp="1"/>
+          </p:cNvSpPr>
+          <p:nvPr>
+            <p:ph idx="1"/>
+          </p:nvPr>
+        </p:nvSpPr>
+        <p:spPr>
+          <a:xfrm>
+            <a:off x="0" y="2084851"/>
+            <a:ext cx="12192000" cy="2404863"/>
+          </a:xfrm>
+        </p:spPr>
+        <p:txBody>
+          <a:bodyPr anchor="ctr">
+            <a:normAutofit/>
+          </a:bodyPr>
+          <a:lstStyle/>
+          <a:p>
+            <a:pPr marL="0" indent="0" algn="ctr">
+              <a:buNone/>
+            </a:pPr>
+            <a:r>
+              <a:rPr lang="vi-VN" sz="4400" b="1" dirty="0">
+                <a:solidFill>
+                  <a:srgbClr val="000066"/>
+                </a:solidFill>
+                <a:latin typeface="Times New Roman" panose="02020603050405020304" pitchFamily="18" charset="0"/>
+                <a:cs typeface="Times New Roman" panose="02020603050405020304" pitchFamily="18" charset="0"/>
+              </a:rPr>
+              <a:t>Lòng mừng chào đón xuân về muôn sắc hoa</a:t>
+            </a:r>
+          </a:p>
+          <a:p>
+            <a:pPr marL="0" indent="0" algn="ctr">
+              <a:buNone/>
+            </a:pPr>
+            <a:r>
+              <a:rPr lang="vi-VN" sz="4400" b="1" dirty="0">
+                <a:solidFill>
+                  <a:srgbClr val="000066"/>
+                </a:solidFill>
+                <a:latin typeface="Times New Roman" panose="02020603050405020304" pitchFamily="18" charset="0"/>
+                <a:cs typeface="Times New Roman" panose="02020603050405020304" pitchFamily="18" charset="0"/>
+              </a:rPr>
+              <a:t>Nguyện cầu mùa xuân an lành trên dân Chúa</a:t>
+            </a:r>
+            <a:endParaRPr lang="en-US" altLang="zh-TW" sz="4400" b="1" dirty="0">
+              <a:solidFill>
+                <a:srgbClr val="000066"/>
+              </a:solidFill>
+              <a:latin typeface="Times New Roman" panose="02020603050405020304" pitchFamily="18" charset="0"/>
+              <a:cs typeface="Times New Roman" panose="02020603050405020304" pitchFamily="18" charset="0"/>
+            </a:endParaRPr>
+          </a:p>
+        </p:txBody>
+      </p:sp>
+    </p:spTree>
+    <p:extLst>
+      <p:ext uri="{BB962C8B-B14F-4D97-AF65-F5344CB8AC3E}">
+        <p14:creationId xmlns:p14="http://schemas.microsoft.com/office/powerpoint/2010/main" val="1601422991"/>
+      </p:ext>
+    </p:extLst>
+  </p:cSld>
+  <p:clrMapOvr>
+    <a:masterClrMapping/>
+  </p:clrMapOvr>
+</p:sld>
+</file>
+
+<file path=ppt/slides/slide13.xml><?xml version="1.0" encoding="utf-8"?>
+<p:sld xmlns:a="http://schemas.openxmlformats.org/drawingml/2006/main" xmlns:r="http://schemas.openxmlformats.org/officeDocument/2006/relationships" xmlns:p="http://schemas.openxmlformats.org/presentationml/2006/main">
+  <p:cSld>
+    <p:spTree>
+      <p:nvGrpSpPr>
+        <p:cNvPr id="1" name="">
+          <a:extLst>
+            <a:ext uri="{FF2B5EF4-FFF2-40B4-BE49-F238E27FC236}">
+              <a16:creationId xmlns:a16="http://schemas.microsoft.com/office/drawing/2014/main" id="{60AFA942-4171-7214-F4EF-EF7448C8C445}"/>
+            </a:ext>
+          </a:extLst>
+        </p:cNvPr>
+        <p:cNvGrpSpPr/>
+        <p:nvPr/>
+      </p:nvGrpSpPr>
+      <p:grpSpPr>
+        <a:xfrm>
+          <a:off x="0" y="0"/>
+          <a:ext cx="0" cy="0"/>
+          <a:chOff x="0" y="0"/>
+          <a:chExt cx="0" cy="0"/>
+        </a:xfrm>
+      </p:grpSpPr>
+      <p:sp>
+        <p:nvSpPr>
+          <p:cNvPr id="5" name="內容版面配置區 4">
+            <a:extLst>
+              <a:ext uri="{FF2B5EF4-FFF2-40B4-BE49-F238E27FC236}">
+                <a16:creationId xmlns:a16="http://schemas.microsoft.com/office/drawing/2014/main" id="{FB0E2EDD-4636-3E69-4452-B8734F4A3C0A}"/>
+              </a:ext>
+            </a:extLst>
+          </p:cNvPr>
+          <p:cNvSpPr>
+            <a:spLocks noGrp="1"/>
+          </p:cNvSpPr>
+          <p:nvPr>
+            <p:ph idx="1"/>
+          </p:nvPr>
+        </p:nvSpPr>
+        <p:spPr>
+          <a:xfrm>
+            <a:off x="0" y="2084851"/>
+            <a:ext cx="12192000" cy="2404863"/>
+          </a:xfrm>
+        </p:spPr>
+        <p:txBody>
+          <a:bodyPr anchor="ctr">
+            <a:normAutofit/>
+          </a:bodyPr>
+          <a:lstStyle/>
+          <a:p>
+            <a:pPr marL="0" indent="0" algn="ctr">
+              <a:buNone/>
+            </a:pPr>
+            <a:r>
+              <a:rPr lang="vi-VN" sz="4400" b="1" dirty="0">
+                <a:solidFill>
+                  <a:srgbClr val="000066"/>
+                </a:solidFill>
+                <a:latin typeface="Times New Roman" panose="02020603050405020304" pitchFamily="18" charset="0"/>
+                <a:cs typeface="Times New Roman" panose="02020603050405020304" pitchFamily="18" charset="0"/>
+              </a:rPr>
+              <a:t>Người người cùng hát vang lừng vui đón xuân</a:t>
+            </a:r>
+          </a:p>
+          <a:p>
+            <a:pPr marL="0" indent="0" algn="ctr">
+              <a:buNone/>
+            </a:pPr>
+            <a:r>
+              <a:rPr lang="vi-VN" sz="4400" b="1" dirty="0">
+                <a:solidFill>
+                  <a:srgbClr val="000066"/>
+                </a:solidFill>
+                <a:latin typeface="Times New Roman" panose="02020603050405020304" pitchFamily="18" charset="0"/>
+                <a:cs typeface="Times New Roman" panose="02020603050405020304" pitchFamily="18" charset="0"/>
+              </a:rPr>
+              <a:t>Người người cùng vui chúc nhau xuân an lành</a:t>
+            </a:r>
+            <a:endParaRPr lang="en-US" altLang="zh-TW" sz="4400" b="1" dirty="0">
+              <a:solidFill>
+                <a:srgbClr val="000066"/>
+              </a:solidFill>
+              <a:latin typeface="Times New Roman" panose="02020603050405020304" pitchFamily="18" charset="0"/>
+              <a:cs typeface="Times New Roman" panose="02020603050405020304" pitchFamily="18" charset="0"/>
+            </a:endParaRPr>
+          </a:p>
+        </p:txBody>
+      </p:sp>
+    </p:spTree>
+    <p:extLst>
+      <p:ext uri="{BB962C8B-B14F-4D97-AF65-F5344CB8AC3E}">
+        <p14:creationId xmlns:p14="http://schemas.microsoft.com/office/powerpoint/2010/main" val="3372235894"/>
       </p:ext>
     </p:extLst>
   </p:cSld>
@@ -3242,109 +3730,149 @@
       </p:grpSpPr>
       <p:sp>
         <p:nvSpPr>
-          <p:cNvPr id="2" name="Title 1"/>
-          <p:cNvSpPr>
-            <a:spLocks noGrp="1"/>
-          </p:cNvSpPr>
-          <p:nvPr>
-            <p:ph type="title"/>
-          </p:nvPr>
-        </p:nvSpPr>
-        <p:spPr/>
+          <p:cNvPr id="5" name="內容版面配置區 4"/>
+          <p:cNvSpPr>
+            <a:spLocks noGrp="1"/>
+          </p:cNvSpPr>
+          <p:nvPr>
+            <p:ph idx="1"/>
+          </p:nvPr>
+        </p:nvSpPr>
+        <p:spPr>
+          <a:xfrm>
+            <a:off x="0" y="2084851"/>
+            <a:ext cx="12192000" cy="2404863"/>
+          </a:xfrm>
+        </p:spPr>
         <p:txBody>
           <a:bodyPr anchor="ctr">
             <a:normAutofit/>
           </a:bodyPr>
           <a:lstStyle/>
           <a:p>
-            <a:pPr algn="ctr"/>
-            <a:r>
-              <a:rPr lang="vi-VN" sz="4000" b="1" dirty="0">
-                <a:latin typeface="+mn-lt"/>
+            <a:pPr marL="0" indent="0" algn="ctr">
+              <a:buNone/>
+            </a:pPr>
+            <a:r>
+              <a:rPr lang="vi-VN" sz="4400" b="1" dirty="0">
+                <a:solidFill>
+                  <a:srgbClr val="000066"/>
+                </a:solidFill>
+                <a:latin typeface="Times New Roman" panose="02020603050405020304" pitchFamily="18" charset="0"/>
+                <a:cs typeface="Times New Roman" panose="02020603050405020304" pitchFamily="18" charset="0"/>
               </a:rPr>
-              <a:t>Xuân An Lành</a:t>
-            </a:r>
-          </a:p>
-        </p:txBody>
-      </p:sp>
-      <p:sp>
-        <p:nvSpPr>
-          <p:cNvPr id="3" name="Content Placeholder 2"/>
-          <p:cNvSpPr>
-            <a:spLocks noGrp="1"/>
-          </p:cNvSpPr>
-          <p:nvPr>
-            <p:ph idx="1"/>
-          </p:nvPr>
+              <a:t>Xuân</a:t>
+            </a:r>
+            <a:r>
+              <a:rPr lang="en-US" sz="4400" b="1" dirty="0">
+                <a:solidFill>
+                  <a:srgbClr val="000066"/>
+                </a:solidFill>
+                <a:latin typeface="Times New Roman" panose="02020603050405020304" pitchFamily="18" charset="0"/>
+                <a:cs typeface="Times New Roman" panose="02020603050405020304" pitchFamily="18" charset="0"/>
+              </a:rPr>
+              <a:t>,</a:t>
+            </a:r>
+            <a:r>
+              <a:rPr lang="vi-VN" sz="4400" b="1" dirty="0">
+                <a:solidFill>
+                  <a:srgbClr val="000066"/>
+                </a:solidFill>
+                <a:latin typeface="Times New Roman" panose="02020603050405020304" pitchFamily="18" charset="0"/>
+                <a:cs typeface="Times New Roman" panose="02020603050405020304" pitchFamily="18" charset="0"/>
+              </a:rPr>
+              <a:t> xuân đã về thắm tươi trên đồng lúa vàng</a:t>
+            </a:r>
+          </a:p>
+          <a:p>
+            <a:pPr marL="0" indent="0" algn="ctr">
+              <a:buNone/>
+            </a:pPr>
+            <a:r>
+              <a:rPr lang="vi-VN" sz="4400" b="1" dirty="0">
+                <a:solidFill>
+                  <a:srgbClr val="000066"/>
+                </a:solidFill>
+                <a:latin typeface="Times New Roman" panose="02020603050405020304" pitchFamily="18" charset="0"/>
+                <a:cs typeface="Times New Roman" panose="02020603050405020304" pitchFamily="18" charset="0"/>
+              </a:rPr>
+              <a:t>Xuân</a:t>
+            </a:r>
+            <a:r>
+              <a:rPr lang="en-US" sz="4400" b="1" dirty="0">
+                <a:solidFill>
+                  <a:srgbClr val="000066"/>
+                </a:solidFill>
+                <a:latin typeface="Times New Roman" panose="02020603050405020304" pitchFamily="18" charset="0"/>
+                <a:cs typeface="Times New Roman" panose="02020603050405020304" pitchFamily="18" charset="0"/>
+              </a:rPr>
+              <a:t>,</a:t>
+            </a:r>
+            <a:r>
+              <a:rPr lang="vi-VN" sz="4400" b="1" dirty="0">
+                <a:solidFill>
+                  <a:srgbClr val="000066"/>
+                </a:solidFill>
+                <a:latin typeface="Times New Roman" panose="02020603050405020304" pitchFamily="18" charset="0"/>
+                <a:cs typeface="Times New Roman" panose="02020603050405020304" pitchFamily="18" charset="0"/>
+              </a:rPr>
+              <a:t> xuân đã về huy hoàng ngàn tia nắng</a:t>
+            </a:r>
+            <a:endParaRPr lang="en-US" altLang="zh-TW" sz="4400" b="1" dirty="0">
+              <a:solidFill>
+                <a:srgbClr val="000066"/>
+              </a:solidFill>
+              <a:latin typeface="Times New Roman" panose="02020603050405020304" pitchFamily="18" charset="0"/>
+              <a:cs typeface="Times New Roman" panose="02020603050405020304" pitchFamily="18" charset="0"/>
+            </a:endParaRPr>
+          </a:p>
+        </p:txBody>
+      </p:sp>
+      <p:sp>
+        <p:nvSpPr>
+          <p:cNvPr id="3" name="TextBox 2"/>
+          <p:cNvSpPr txBox="1"/>
+          <p:nvPr/>
         </p:nvSpPr>
         <p:spPr>
           <a:xfrm>
-            <a:off x="0" y="1825625"/>
-            <a:ext cx="12192000" cy="4351338"/>
+            <a:off x="0" y="5253203"/>
+            <a:ext cx="12192000" cy="584775"/>
           </a:xfrm>
+          <a:prstGeom prst="rect">
+            <a:avLst/>
+          </a:prstGeom>
+          <a:noFill/>
         </p:spPr>
         <p:txBody>
-          <a:bodyPr anchor="t">
-            <a:normAutofit/>
+          <a:bodyPr wrap="square" rtlCol="0">
+            <a:spAutoFit/>
           </a:bodyPr>
           <a:lstStyle/>
           <a:p>
-            <a:pPr marL="0" indent="0" algn="ctr">
-              <a:buNone/>
-            </a:pPr>
-            <a:r>
-              <a:rPr lang="vi-VN" sz="3600" b="1" dirty="0"/>
-              <a:t>Lòng mừng chào đón xuân về muôn sắc </a:t>
-            </a:r>
-            <a:r>
-              <a:rPr lang="vi-VN" sz="3600" b="1" dirty="0"/>
-              <a:t>hoa</a:t>
-            </a:r>
-            <a:endParaRPr lang="vi-VN" sz="3600" b="1" dirty="0"/>
-          </a:p>
-          <a:p>
-            <a:pPr marL="0" indent="0" algn="ctr">
-              <a:buNone/>
-            </a:pPr>
-            <a:r>
-              <a:rPr lang="vi-VN" sz="3600" b="1" dirty="0"/>
-              <a:t>Nguyện cầu mùa xuân an lành trên dân </a:t>
-            </a:r>
-            <a:r>
-              <a:rPr lang="vi-VN" sz="3600" b="1" dirty="0"/>
-              <a:t>Chúa</a:t>
-            </a:r>
-            <a:endParaRPr lang="vi-VN" sz="3600" b="1" dirty="0"/>
-          </a:p>
-          <a:p>
-            <a:pPr marL="0" indent="0" algn="ctr">
-              <a:buNone/>
-            </a:pPr>
-            <a:r>
-              <a:rPr lang="vi-VN" sz="3600" b="1" dirty="0"/>
-              <a:t>Người người cùng hát vang lừng vui đón </a:t>
-            </a:r>
-            <a:r>
-              <a:rPr lang="vi-VN" sz="3600" b="1" dirty="0"/>
-              <a:t>xuân</a:t>
-            </a:r>
-            <a:endParaRPr lang="vi-VN" sz="3600" b="1" dirty="0"/>
-          </a:p>
-          <a:p>
-            <a:pPr marL="0" indent="0" algn="ctr">
-              <a:buNone/>
-            </a:pPr>
-            <a:r>
-              <a:rPr lang="vi-VN" sz="3600" b="1" dirty="0"/>
-              <a:t>Người người cùng vui chúc nhau xuân an lành</a:t>
-            </a:r>
+            <a:pPr algn="ctr"/>
+            <a:r>
+              <a:rPr lang="en-US" sz="3200" b="1" dirty="0">
+                <a:solidFill>
+                  <a:srgbClr val="000066"/>
+                </a:solidFill>
+                <a:effectLst/>
+              </a:rPr>
+              <a:t>( 1 / 3 )</a:t>
+            </a:r>
+            <a:endParaRPr lang="vi-VN" sz="3200" b="1" dirty="0">
+              <a:solidFill>
+                <a:srgbClr val="000066"/>
+              </a:solidFill>
+              <a:effectLst/>
+            </a:endParaRPr>
           </a:p>
         </p:txBody>
       </p:sp>
     </p:spTree>
     <p:extLst>
       <p:ext uri="{BB962C8B-B14F-4D97-AF65-F5344CB8AC3E}">
-        <p14:creationId xmlns:p14="http://schemas.microsoft.com/office/powerpoint/2010/main" val="4141082203"/>
+        <p14:creationId xmlns:p14="http://schemas.microsoft.com/office/powerpoint/2010/main" val="3763218353"/>
       </p:ext>
     </p:extLst>
   </p:cSld>
@@ -3359,7 +3887,13 @@
   <p:cSld>
     <p:spTree>
       <p:nvGrpSpPr>
-        <p:cNvPr id="1" name=""/>
+        <p:cNvPr id="1" name="">
+          <a:extLst>
+            <a:ext uri="{FF2B5EF4-FFF2-40B4-BE49-F238E27FC236}">
+              <a16:creationId xmlns:a16="http://schemas.microsoft.com/office/drawing/2014/main" id="{90AF4790-36C6-B138-AB14-CB2A17F3D809}"/>
+            </a:ext>
+          </a:extLst>
+        </p:cNvPr>
         <p:cNvGrpSpPr/>
         <p:nvPr/>
       </p:nvGrpSpPr>
@@ -3373,109 +3907,154 @@
       </p:grpSpPr>
       <p:sp>
         <p:nvSpPr>
-          <p:cNvPr id="2" name="Title 1"/>
-          <p:cNvSpPr>
-            <a:spLocks noGrp="1"/>
-          </p:cNvSpPr>
-          <p:nvPr>
-            <p:ph type="title"/>
-          </p:nvPr>
-        </p:nvSpPr>
-        <p:spPr/>
+          <p:cNvPr id="5" name="內容版面配置區 4">
+            <a:extLst>
+              <a:ext uri="{FF2B5EF4-FFF2-40B4-BE49-F238E27FC236}">
+                <a16:creationId xmlns:a16="http://schemas.microsoft.com/office/drawing/2014/main" id="{A392DFEF-5F94-B53F-4C1E-3A3155C8C603}"/>
+              </a:ext>
+            </a:extLst>
+          </p:cNvPr>
+          <p:cNvSpPr>
+            <a:spLocks noGrp="1"/>
+          </p:cNvSpPr>
+          <p:nvPr>
+            <p:ph idx="1"/>
+          </p:nvPr>
+        </p:nvSpPr>
+        <p:spPr>
+          <a:xfrm>
+            <a:off x="0" y="2084851"/>
+            <a:ext cx="12192000" cy="2404863"/>
+          </a:xfrm>
+        </p:spPr>
         <p:txBody>
           <a:bodyPr anchor="ctr">
             <a:normAutofit/>
           </a:bodyPr>
           <a:lstStyle/>
           <a:p>
-            <a:pPr algn="ctr"/>
-            <a:r>
-              <a:rPr lang="vi-VN" sz="4000" b="1" dirty="0">
-                <a:latin typeface="+mn-lt"/>
+            <a:pPr marL="0" indent="0" algn="ctr">
+              <a:buNone/>
+            </a:pPr>
+            <a:r>
+              <a:rPr lang="vi-VN" sz="4200" b="1" dirty="0">
+                <a:solidFill>
+                  <a:srgbClr val="000066"/>
+                </a:solidFill>
+                <a:latin typeface="Times New Roman" panose="02020603050405020304" pitchFamily="18" charset="0"/>
+                <a:cs typeface="Times New Roman" panose="02020603050405020304" pitchFamily="18" charset="0"/>
               </a:rPr>
-              <a:t>Xuân An Lành</a:t>
-            </a:r>
-          </a:p>
-        </p:txBody>
-      </p:sp>
-      <p:sp>
-        <p:nvSpPr>
-          <p:cNvPr id="3" name="Content Placeholder 2"/>
-          <p:cNvSpPr>
-            <a:spLocks noGrp="1"/>
-          </p:cNvSpPr>
-          <p:nvPr>
-            <p:ph idx="1"/>
-          </p:nvPr>
+              <a:t>Xuân</a:t>
+            </a:r>
+            <a:r>
+              <a:rPr lang="en-US" sz="4200" b="1" dirty="0">
+                <a:solidFill>
+                  <a:srgbClr val="000066"/>
+                </a:solidFill>
+                <a:latin typeface="Times New Roman" panose="02020603050405020304" pitchFamily="18" charset="0"/>
+                <a:cs typeface="Times New Roman" panose="02020603050405020304" pitchFamily="18" charset="0"/>
+              </a:rPr>
+              <a:t>,</a:t>
+            </a:r>
+            <a:r>
+              <a:rPr lang="vi-VN" sz="4200" b="1" dirty="0">
+                <a:solidFill>
+                  <a:srgbClr val="000066"/>
+                </a:solidFill>
+                <a:latin typeface="Times New Roman" panose="02020603050405020304" pitchFamily="18" charset="0"/>
+                <a:cs typeface="Times New Roman" panose="02020603050405020304" pitchFamily="18" charset="0"/>
+              </a:rPr>
+              <a:t> xuân đã về ngát hương đêm mộng thanh bình</a:t>
+            </a:r>
+          </a:p>
+          <a:p>
+            <a:pPr marL="0" indent="0" algn="ctr">
+              <a:buNone/>
+            </a:pPr>
+            <a:r>
+              <a:rPr lang="vi-VN" sz="4200" b="1" dirty="0">
+                <a:solidFill>
+                  <a:srgbClr val="000066"/>
+                </a:solidFill>
+                <a:latin typeface="Times New Roman" panose="02020603050405020304" pitchFamily="18" charset="0"/>
+                <a:cs typeface="Times New Roman" panose="02020603050405020304" pitchFamily="18" charset="0"/>
+              </a:rPr>
+              <a:t>Xuân</a:t>
+            </a:r>
+            <a:r>
+              <a:rPr lang="en-US" sz="4200" b="1" dirty="0">
+                <a:solidFill>
+                  <a:srgbClr val="000066"/>
+                </a:solidFill>
+                <a:latin typeface="Times New Roman" panose="02020603050405020304" pitchFamily="18" charset="0"/>
+                <a:cs typeface="Times New Roman" panose="02020603050405020304" pitchFamily="18" charset="0"/>
+              </a:rPr>
+              <a:t>,</a:t>
+            </a:r>
+            <a:r>
+              <a:rPr lang="vi-VN" sz="4200" b="1" dirty="0">
+                <a:solidFill>
+                  <a:srgbClr val="000066"/>
+                </a:solidFill>
+                <a:latin typeface="Times New Roman" panose="02020603050405020304" pitchFamily="18" charset="0"/>
+                <a:cs typeface="Times New Roman" panose="02020603050405020304" pitchFamily="18" charset="0"/>
+              </a:rPr>
+              <a:t> xuân đã về khắp nơi tràn ngập tiếng ca</a:t>
+            </a:r>
+          </a:p>
+        </p:txBody>
+      </p:sp>
+      <p:sp>
+        <p:nvSpPr>
+          <p:cNvPr id="3" name="TextBox 2">
+            <a:extLst>
+              <a:ext uri="{FF2B5EF4-FFF2-40B4-BE49-F238E27FC236}">
+                <a16:creationId xmlns:a16="http://schemas.microsoft.com/office/drawing/2014/main" id="{86637836-09DF-3AA5-1464-B1DD66561DD0}"/>
+              </a:ext>
+            </a:extLst>
+          </p:cNvPr>
+          <p:cNvSpPr txBox="1"/>
+          <p:nvPr/>
         </p:nvSpPr>
         <p:spPr>
           <a:xfrm>
-            <a:off x="0" y="1825625"/>
-            <a:ext cx="12192000" cy="4351338"/>
+            <a:off x="0" y="5253203"/>
+            <a:ext cx="12192000" cy="584775"/>
           </a:xfrm>
+          <a:prstGeom prst="rect">
+            <a:avLst/>
+          </a:prstGeom>
+          <a:noFill/>
         </p:spPr>
         <p:txBody>
-          <a:bodyPr anchor="t">
-            <a:normAutofit/>
+          <a:bodyPr wrap="square" rtlCol="0">
+            <a:spAutoFit/>
           </a:bodyPr>
           <a:lstStyle/>
           <a:p>
-            <a:pPr marL="0" indent="0" algn="ctr">
-              <a:buNone/>
-            </a:pPr>
-            <a:r>
-              <a:rPr lang="vi-VN" sz="3600" b="1" dirty="0"/>
-              <a:t>Xuân xuân đã về gió xuân xao động muôn </a:t>
-            </a:r>
-            <a:r>
-              <a:rPr lang="vi-VN" sz="3600" b="1" dirty="0"/>
-              <a:t>loài</a:t>
-            </a:r>
-            <a:endParaRPr lang="vi-VN" sz="3600" b="1" dirty="0"/>
-          </a:p>
-          <a:p>
-            <a:pPr marL="0" indent="0" algn="ctr">
-              <a:buNone/>
-            </a:pPr>
-            <a:r>
-              <a:rPr lang="vi-VN" sz="3600" b="1" dirty="0"/>
-              <a:t>Xuân xuân đã về muôn ngàn mầm xuân </a:t>
-            </a:r>
-            <a:r>
-              <a:rPr lang="vi-VN" sz="3600" b="1" dirty="0"/>
-              <a:t>mới</a:t>
-            </a:r>
-            <a:endParaRPr lang="vi-VN" sz="3600" b="1" dirty="0"/>
-          </a:p>
-          <a:p>
-            <a:pPr marL="0" indent="0" algn="ctr">
-              <a:buNone/>
-            </a:pPr>
-            <a:r>
-              <a:rPr lang="vi-VN" sz="3600" b="1" dirty="0"/>
-              <a:t>Xuân xuân đã về điểm tô tâm hồn nhân </a:t>
-            </a:r>
-            <a:r>
-              <a:rPr lang="vi-VN" sz="3600" b="1" dirty="0"/>
-              <a:t>loại</a:t>
-            </a:r>
-            <a:endParaRPr lang="vi-VN" sz="3600" b="1" dirty="0"/>
-          </a:p>
-          <a:p>
-            <a:pPr marL="0" indent="0" algn="ctr">
-              <a:buNone/>
-            </a:pPr>
-            <a:r>
-              <a:rPr lang="vi-VN" sz="3600" b="1" dirty="0"/>
-              <a:t>Xuân ơi hãy đẹp mãi trên môi cười thế nhân</a:t>
-            </a:r>
+            <a:pPr algn="ctr"/>
+            <a:r>
+              <a:rPr lang="en-US" sz="3200" b="1" dirty="0">
+                <a:solidFill>
+                  <a:srgbClr val="000066"/>
+                </a:solidFill>
+                <a:effectLst/>
+              </a:rPr>
+              <a:t>( 1 / 3 )</a:t>
+            </a:r>
+            <a:endParaRPr lang="vi-VN" sz="3200" b="1" dirty="0">
+              <a:solidFill>
+                <a:srgbClr val="000066"/>
+              </a:solidFill>
+              <a:effectLst/>
+            </a:endParaRPr>
           </a:p>
         </p:txBody>
       </p:sp>
     </p:spTree>
     <p:extLst>
       <p:ext uri="{BB962C8B-B14F-4D97-AF65-F5344CB8AC3E}">
-        <p14:creationId xmlns:p14="http://schemas.microsoft.com/office/powerpoint/2010/main" val="547199200"/>
+        <p14:creationId xmlns:p14="http://schemas.microsoft.com/office/powerpoint/2010/main" val="2923346150"/>
       </p:ext>
     </p:extLst>
   </p:cSld>
@@ -3490,7 +4069,13 @@
   <p:cSld>
     <p:spTree>
       <p:nvGrpSpPr>
-        <p:cNvPr id="1" name=""/>
+        <p:cNvPr id="1" name="">
+          <a:extLst>
+            <a:ext uri="{FF2B5EF4-FFF2-40B4-BE49-F238E27FC236}">
+              <a16:creationId xmlns:a16="http://schemas.microsoft.com/office/drawing/2014/main" id="{DE5751AA-3DD7-635F-6E6C-BD7DDB83313B}"/>
+            </a:ext>
+          </a:extLst>
+        </p:cNvPr>
         <p:cNvGrpSpPr/>
         <p:nvPr/>
       </p:nvGrpSpPr>
@@ -3504,109 +4089,74 @@
       </p:grpSpPr>
       <p:sp>
         <p:nvSpPr>
-          <p:cNvPr id="2" name="Title 1"/>
-          <p:cNvSpPr>
-            <a:spLocks noGrp="1"/>
-          </p:cNvSpPr>
-          <p:nvPr>
-            <p:ph type="title"/>
-          </p:nvPr>
-        </p:nvSpPr>
-        <p:spPr/>
+          <p:cNvPr id="5" name="內容版面配置區 4">
+            <a:extLst>
+              <a:ext uri="{FF2B5EF4-FFF2-40B4-BE49-F238E27FC236}">
+                <a16:creationId xmlns:a16="http://schemas.microsoft.com/office/drawing/2014/main" id="{83B1B376-6F77-A654-A03D-1E4A7B912B8F}"/>
+              </a:ext>
+            </a:extLst>
+          </p:cNvPr>
+          <p:cNvSpPr>
+            <a:spLocks noGrp="1"/>
+          </p:cNvSpPr>
+          <p:nvPr>
+            <p:ph idx="1"/>
+          </p:nvPr>
+        </p:nvSpPr>
+        <p:spPr>
+          <a:xfrm>
+            <a:off x="0" y="2084851"/>
+            <a:ext cx="12192000" cy="2404863"/>
+          </a:xfrm>
+        </p:spPr>
         <p:txBody>
           <a:bodyPr anchor="ctr">
             <a:normAutofit/>
           </a:bodyPr>
           <a:lstStyle/>
           <a:p>
-            <a:pPr algn="ctr"/>
-            <a:r>
-              <a:rPr lang="vi-VN" sz="4000" b="1" dirty="0">
-                <a:latin typeface="+mn-lt"/>
+            <a:pPr marL="0" indent="0" algn="ctr">
+              <a:buNone/>
+            </a:pPr>
+            <a:r>
+              <a:rPr lang="vi-VN" sz="4400" b="1" dirty="0">
+                <a:solidFill>
+                  <a:srgbClr val="000066"/>
+                </a:solidFill>
+                <a:latin typeface="Times New Roman" panose="02020603050405020304" pitchFamily="18" charset="0"/>
+                <a:cs typeface="Times New Roman" panose="02020603050405020304" pitchFamily="18" charset="0"/>
               </a:rPr>
-              <a:t>Xuân An Lành</a:t>
-            </a:r>
-          </a:p>
-        </p:txBody>
-      </p:sp>
-      <p:sp>
-        <p:nvSpPr>
-          <p:cNvPr id="3" name="Content Placeholder 2"/>
-          <p:cNvSpPr>
-            <a:spLocks noGrp="1"/>
-          </p:cNvSpPr>
-          <p:nvPr>
-            <p:ph idx="1"/>
-          </p:nvPr>
-        </p:nvSpPr>
-        <p:spPr>
-          <a:xfrm>
-            <a:off x="0" y="1825625"/>
-            <a:ext cx="12192000" cy="4351338"/>
-          </a:xfrm>
-        </p:spPr>
-        <p:txBody>
-          <a:bodyPr anchor="t">
-            <a:normAutofit/>
-          </a:bodyPr>
-          <a:lstStyle/>
+              <a:t>Lòng mừng chào đón xuân về muôn sắc hoa</a:t>
+            </a:r>
+          </a:p>
           <a:p>
             <a:pPr marL="0" indent="0" algn="ctr">
               <a:buNone/>
             </a:pPr>
             <a:r>
-              <a:rPr lang="vi-VN" sz="3600" b="1" dirty="0"/>
-              <a:t>Lòng mừng chào đón xuân về muôn sắc </a:t>
-            </a:r>
-            <a:r>
-              <a:rPr lang="vi-VN" sz="3600" b="1" dirty="0"/>
-              <a:t>hoa</a:t>
-            </a:r>
-            <a:endParaRPr lang="vi-VN" sz="3600" b="1" dirty="0"/>
-          </a:p>
-          <a:p>
-            <a:pPr marL="0" indent="0" algn="ctr">
-              <a:buNone/>
-            </a:pPr>
-            <a:r>
-              <a:rPr lang="vi-VN" sz="3600" b="1" dirty="0"/>
-              <a:t>Nguyện cầu mùa xuân an lành trên dân </a:t>
-            </a:r>
-            <a:r>
-              <a:rPr lang="vi-VN" sz="3600" b="1" dirty="0"/>
-              <a:t>Chúa</a:t>
-            </a:r>
-            <a:endParaRPr lang="vi-VN" sz="3600" b="1" dirty="0"/>
-          </a:p>
-          <a:p>
-            <a:pPr marL="0" indent="0" algn="ctr">
-              <a:buNone/>
-            </a:pPr>
-            <a:r>
-              <a:rPr lang="vi-VN" sz="3600" b="1" dirty="0"/>
-              <a:t>Người người cùng hát vang lừng vui đón </a:t>
-            </a:r>
-            <a:r>
-              <a:rPr lang="vi-VN" sz="3600" b="1" dirty="0"/>
-              <a:t>xuân</a:t>
-            </a:r>
-            <a:endParaRPr lang="vi-VN" sz="3600" b="1" dirty="0"/>
-          </a:p>
-          <a:p>
-            <a:pPr marL="0" indent="0" algn="ctr">
-              <a:buNone/>
-            </a:pPr>
-            <a:r>
-              <a:rPr lang="vi-VN" sz="3600" b="1" dirty="0"/>
-              <a:t>Người người cùng vui chúc nhau xuân an lành</a:t>
-            </a:r>
+              <a:rPr lang="vi-VN" sz="4400" b="1" dirty="0">
+                <a:solidFill>
+                  <a:srgbClr val="000066"/>
+                </a:solidFill>
+                <a:latin typeface="Times New Roman" panose="02020603050405020304" pitchFamily="18" charset="0"/>
+                <a:cs typeface="Times New Roman" panose="02020603050405020304" pitchFamily="18" charset="0"/>
+              </a:rPr>
+              <a:t>Nguyện cầu mùa xuân an lành trên dân Chúa</a:t>
+            </a:r>
+            <a:endParaRPr lang="en-US" altLang="zh-TW" sz="4400" b="1" dirty="0">
+              <a:solidFill>
+                <a:srgbClr val="000066"/>
+              </a:solidFill>
+              <a:latin typeface="Times New Roman" panose="02020603050405020304" pitchFamily="18" charset="0"/>
+              <a:cs typeface="Times New Roman" panose="02020603050405020304" pitchFamily="18" charset="0"/>
+            </a:endParaRPr>
           </a:p>
         </p:txBody>
       </p:sp>
     </p:spTree>
     <p:extLst>
       <p:ext uri="{BB962C8B-B14F-4D97-AF65-F5344CB8AC3E}">
-        <p14:creationId xmlns:p14="http://schemas.microsoft.com/office/powerpoint/2010/main" val="4224103061"/>
+        <p14:creationId xmlns:p14="http://schemas.microsoft.com/office/powerpoint/2010/main" val="17352927"/>
       </p:ext>
     </p:extLst>
   </p:cSld>
@@ -3621,7 +4171,13 @@
   <p:cSld>
     <p:spTree>
       <p:nvGrpSpPr>
-        <p:cNvPr id="1" name=""/>
+        <p:cNvPr id="1" name="">
+          <a:extLst>
+            <a:ext uri="{FF2B5EF4-FFF2-40B4-BE49-F238E27FC236}">
+              <a16:creationId xmlns:a16="http://schemas.microsoft.com/office/drawing/2014/main" id="{E7693925-64C3-97A4-89D7-387D4BFB8F7A}"/>
+            </a:ext>
+          </a:extLst>
+        </p:cNvPr>
         <p:cNvGrpSpPr/>
         <p:nvPr/>
       </p:nvGrpSpPr>
@@ -3635,109 +4191,74 @@
       </p:grpSpPr>
       <p:sp>
         <p:nvSpPr>
-          <p:cNvPr id="2" name="Title 1"/>
-          <p:cNvSpPr>
-            <a:spLocks noGrp="1"/>
-          </p:cNvSpPr>
-          <p:nvPr>
-            <p:ph type="title"/>
-          </p:nvPr>
-        </p:nvSpPr>
-        <p:spPr/>
+          <p:cNvPr id="5" name="內容版面配置區 4">
+            <a:extLst>
+              <a:ext uri="{FF2B5EF4-FFF2-40B4-BE49-F238E27FC236}">
+                <a16:creationId xmlns:a16="http://schemas.microsoft.com/office/drawing/2014/main" id="{8CCC3267-B161-9818-21F1-E116A5B4C3F8}"/>
+              </a:ext>
+            </a:extLst>
+          </p:cNvPr>
+          <p:cNvSpPr>
+            <a:spLocks noGrp="1"/>
+          </p:cNvSpPr>
+          <p:nvPr>
+            <p:ph idx="1"/>
+          </p:nvPr>
+        </p:nvSpPr>
+        <p:spPr>
+          <a:xfrm>
+            <a:off x="0" y="2084851"/>
+            <a:ext cx="12192000" cy="2404863"/>
+          </a:xfrm>
+        </p:spPr>
         <p:txBody>
           <a:bodyPr anchor="ctr">
             <a:normAutofit/>
           </a:bodyPr>
           <a:lstStyle/>
           <a:p>
-            <a:pPr algn="ctr"/>
-            <a:r>
-              <a:rPr lang="vi-VN" sz="4000" b="1" dirty="0">
-                <a:latin typeface="+mn-lt"/>
+            <a:pPr marL="0" indent="0" algn="ctr">
+              <a:buNone/>
+            </a:pPr>
+            <a:r>
+              <a:rPr lang="vi-VN" sz="4400" b="1" dirty="0">
+                <a:solidFill>
+                  <a:srgbClr val="000066"/>
+                </a:solidFill>
+                <a:latin typeface="Times New Roman" panose="02020603050405020304" pitchFamily="18" charset="0"/>
+                <a:cs typeface="Times New Roman" panose="02020603050405020304" pitchFamily="18" charset="0"/>
               </a:rPr>
-              <a:t>Xuân An Lành</a:t>
-            </a:r>
-          </a:p>
-        </p:txBody>
-      </p:sp>
-      <p:sp>
-        <p:nvSpPr>
-          <p:cNvPr id="3" name="Content Placeholder 2"/>
-          <p:cNvSpPr>
-            <a:spLocks noGrp="1"/>
-          </p:cNvSpPr>
-          <p:nvPr>
-            <p:ph idx="1"/>
-          </p:nvPr>
-        </p:nvSpPr>
-        <p:spPr>
-          <a:xfrm>
-            <a:off x="0" y="1825625"/>
-            <a:ext cx="12192000" cy="4351338"/>
-          </a:xfrm>
-        </p:spPr>
-        <p:txBody>
-          <a:bodyPr anchor="t">
-            <a:normAutofit/>
-          </a:bodyPr>
-          <a:lstStyle/>
+              <a:t>Người người cùng hát vang lừng vui đón xuân</a:t>
+            </a:r>
+          </a:p>
           <a:p>
             <a:pPr marL="0" indent="0" algn="ctr">
               <a:buNone/>
             </a:pPr>
             <a:r>
-              <a:rPr lang="vi-VN" sz="3600" b="1" dirty="0"/>
-              <a:t>Xuân xuân đã về thắm tươi trên đồng lúa </a:t>
-            </a:r>
-            <a:r>
-              <a:rPr lang="vi-VN" sz="3600" b="1" dirty="0"/>
-              <a:t>vàng</a:t>
-            </a:r>
-            <a:endParaRPr lang="vi-VN" sz="3600" b="1" dirty="0"/>
-          </a:p>
-          <a:p>
-            <a:pPr marL="0" indent="0" algn="ctr">
-              <a:buNone/>
-            </a:pPr>
-            <a:r>
-              <a:rPr lang="vi-VN" sz="3600" b="1" dirty="0"/>
-              <a:t>Xuân xuân đã về trong lòng người con </a:t>
-            </a:r>
-            <a:r>
-              <a:rPr lang="vi-VN" sz="3600" b="1" dirty="0"/>
-              <a:t>Chúa</a:t>
-            </a:r>
-            <a:endParaRPr lang="vi-VN" sz="3600" b="1" dirty="0"/>
-          </a:p>
-          <a:p>
-            <a:pPr marL="0" indent="0" algn="ctr">
-              <a:buNone/>
-            </a:pPr>
-            <a:r>
-              <a:rPr lang="vi-VN" sz="3600" b="1" dirty="0"/>
-              <a:t>Bao nhiêu ước nguyện thiết tha khi mùa xuân </a:t>
-            </a:r>
-            <a:r>
-              <a:rPr lang="vi-VN" sz="3600" b="1" dirty="0"/>
-              <a:t>về</a:t>
-            </a:r>
-            <a:endParaRPr lang="vi-VN" sz="3600" b="1" dirty="0"/>
-          </a:p>
-          <a:p>
-            <a:pPr marL="0" indent="0" algn="ctr">
-              <a:buNone/>
-            </a:pPr>
-            <a:r>
-              <a:rPr lang="vi-VN" sz="3600" b="1" dirty="0"/>
-              <a:t>Mong nhân thế trọn ước mơ thanh bình ngát hương</a:t>
-            </a:r>
+              <a:rPr lang="vi-VN" sz="4400" b="1" dirty="0">
+                <a:solidFill>
+                  <a:srgbClr val="000066"/>
+                </a:solidFill>
+                <a:latin typeface="Times New Roman" panose="02020603050405020304" pitchFamily="18" charset="0"/>
+                <a:cs typeface="Times New Roman" panose="02020603050405020304" pitchFamily="18" charset="0"/>
+              </a:rPr>
+              <a:t>Người người cùng vui chúc nhau xuân an lành</a:t>
+            </a:r>
+            <a:endParaRPr lang="en-US" altLang="zh-TW" sz="4400" b="1" dirty="0">
+              <a:solidFill>
+                <a:srgbClr val="000066"/>
+              </a:solidFill>
+              <a:latin typeface="Times New Roman" panose="02020603050405020304" pitchFamily="18" charset="0"/>
+              <a:cs typeface="Times New Roman" panose="02020603050405020304" pitchFamily="18" charset="0"/>
+            </a:endParaRPr>
           </a:p>
         </p:txBody>
       </p:sp>
     </p:spTree>
     <p:extLst>
       <p:ext uri="{BB962C8B-B14F-4D97-AF65-F5344CB8AC3E}">
-        <p14:creationId xmlns:p14="http://schemas.microsoft.com/office/powerpoint/2010/main" val="725951187"/>
+        <p14:creationId xmlns:p14="http://schemas.microsoft.com/office/powerpoint/2010/main" val="453329921"/>
       </p:ext>
     </p:extLst>
   </p:cSld>
@@ -3752,7 +4273,13 @@
   <p:cSld>
     <p:spTree>
       <p:nvGrpSpPr>
-        <p:cNvPr id="1" name=""/>
+        <p:cNvPr id="1" name="">
+          <a:extLst>
+            <a:ext uri="{FF2B5EF4-FFF2-40B4-BE49-F238E27FC236}">
+              <a16:creationId xmlns:a16="http://schemas.microsoft.com/office/drawing/2014/main" id="{4959315E-5D42-1E41-CF5E-60EDB0F3841F}"/>
+            </a:ext>
+          </a:extLst>
+        </p:cNvPr>
         <p:cNvGrpSpPr/>
         <p:nvPr/>
       </p:nvGrpSpPr>
@@ -3766,109 +4293,467 @@
       </p:grpSpPr>
       <p:sp>
         <p:nvSpPr>
-          <p:cNvPr id="2" name="Title 1"/>
-          <p:cNvSpPr>
-            <a:spLocks noGrp="1"/>
-          </p:cNvSpPr>
-          <p:nvPr>
-            <p:ph type="title"/>
-          </p:nvPr>
-        </p:nvSpPr>
-        <p:spPr/>
+          <p:cNvPr id="5" name="內容版面配置區 4">
+            <a:extLst>
+              <a:ext uri="{FF2B5EF4-FFF2-40B4-BE49-F238E27FC236}">
+                <a16:creationId xmlns:a16="http://schemas.microsoft.com/office/drawing/2014/main" id="{A7D50DD9-EC82-0ACA-4A7A-FC9B3D5648D1}"/>
+              </a:ext>
+            </a:extLst>
+          </p:cNvPr>
+          <p:cNvSpPr>
+            <a:spLocks noGrp="1"/>
+          </p:cNvSpPr>
+          <p:nvPr>
+            <p:ph idx="1"/>
+          </p:nvPr>
+        </p:nvSpPr>
+        <p:spPr>
+          <a:xfrm>
+            <a:off x="0" y="2084851"/>
+            <a:ext cx="12192000" cy="2404863"/>
+          </a:xfrm>
+        </p:spPr>
         <p:txBody>
           <a:bodyPr anchor="ctr">
             <a:normAutofit/>
           </a:bodyPr>
           <a:lstStyle/>
           <a:p>
-            <a:pPr algn="ctr"/>
-            <a:r>
-              <a:rPr lang="vi-VN" sz="4000" b="1" dirty="0">
-                <a:latin typeface="+mn-lt"/>
+            <a:pPr marL="0" indent="0" algn="ctr">
+              <a:buNone/>
+            </a:pPr>
+            <a:r>
+              <a:rPr lang="vi-VN" sz="4400" b="1" dirty="0">
+                <a:solidFill>
+                  <a:srgbClr val="000066"/>
+                </a:solidFill>
+                <a:latin typeface="Times New Roman" panose="02020603050405020304" pitchFamily="18" charset="0"/>
+                <a:cs typeface="Times New Roman" panose="02020603050405020304" pitchFamily="18" charset="0"/>
               </a:rPr>
-              <a:t>Xuân An Lành</a:t>
-            </a:r>
-          </a:p>
-        </p:txBody>
-      </p:sp>
-      <p:sp>
-        <p:nvSpPr>
-          <p:cNvPr id="3" name="Content Placeholder 2"/>
-          <p:cNvSpPr>
-            <a:spLocks noGrp="1"/>
-          </p:cNvSpPr>
-          <p:nvPr>
-            <p:ph idx="1"/>
-          </p:nvPr>
+              <a:t>Xuân xuân đã về gió xuân xao động muôn loài</a:t>
+            </a:r>
+          </a:p>
+          <a:p>
+            <a:pPr marL="0" indent="0" algn="ctr">
+              <a:buNone/>
+            </a:pPr>
+            <a:r>
+              <a:rPr lang="vi-VN" sz="4400" b="1" dirty="0">
+                <a:solidFill>
+                  <a:srgbClr val="000066"/>
+                </a:solidFill>
+                <a:latin typeface="Times New Roman" panose="02020603050405020304" pitchFamily="18" charset="0"/>
+                <a:cs typeface="Times New Roman" panose="02020603050405020304" pitchFamily="18" charset="0"/>
+              </a:rPr>
+              <a:t>Xuân xuân đã về muôn ngàn mầm xanh mới</a:t>
+            </a:r>
+            <a:endParaRPr lang="en-US" altLang="zh-TW" sz="4400" b="1" dirty="0">
+              <a:solidFill>
+                <a:srgbClr val="000066"/>
+              </a:solidFill>
+              <a:latin typeface="Times New Roman" panose="02020603050405020304" pitchFamily="18" charset="0"/>
+              <a:cs typeface="Times New Roman" panose="02020603050405020304" pitchFamily="18" charset="0"/>
+            </a:endParaRPr>
+          </a:p>
+        </p:txBody>
+      </p:sp>
+      <p:sp>
+        <p:nvSpPr>
+          <p:cNvPr id="3" name="TextBox 2">
+            <a:extLst>
+              <a:ext uri="{FF2B5EF4-FFF2-40B4-BE49-F238E27FC236}">
+                <a16:creationId xmlns:a16="http://schemas.microsoft.com/office/drawing/2014/main" id="{7A84DBDF-2381-F93C-4356-D644DE26B49C}"/>
+              </a:ext>
+            </a:extLst>
+          </p:cNvPr>
+          <p:cNvSpPr txBox="1"/>
+          <p:nvPr/>
         </p:nvSpPr>
         <p:spPr>
           <a:xfrm>
-            <a:off x="0" y="1825625"/>
-            <a:ext cx="12192000" cy="4351338"/>
+            <a:off x="0" y="5253203"/>
+            <a:ext cx="12192000" cy="584775"/>
           </a:xfrm>
+          <a:prstGeom prst="rect">
+            <a:avLst/>
+          </a:prstGeom>
+          <a:noFill/>
         </p:spPr>
         <p:txBody>
-          <a:bodyPr anchor="t">
-            <a:normAutofit/>
+          <a:bodyPr wrap="square" rtlCol="0">
+            <a:spAutoFit/>
           </a:bodyPr>
           <a:lstStyle/>
           <a:p>
-            <a:pPr marL="0" indent="0" algn="ctr">
-              <a:buNone/>
-            </a:pPr>
-            <a:r>
-              <a:rPr lang="vi-VN" sz="3600" b="1" dirty="0"/>
-              <a:t>Lòng mừng chào đón xuân về muôn sắc </a:t>
-            </a:r>
-            <a:r>
-              <a:rPr lang="vi-VN" sz="3600" b="1" dirty="0"/>
-              <a:t>hoa</a:t>
-            </a:r>
-            <a:endParaRPr lang="vi-VN" sz="3600" b="1" dirty="0"/>
-          </a:p>
-          <a:p>
-            <a:pPr marL="0" indent="0" algn="ctr">
-              <a:buNone/>
-            </a:pPr>
-            <a:r>
-              <a:rPr lang="vi-VN" sz="3600" b="1" dirty="0"/>
-              <a:t>Nguyện cầu mùa xuân an lành trên dân </a:t>
-            </a:r>
-            <a:r>
-              <a:rPr lang="vi-VN" sz="3600" b="1" dirty="0"/>
-              <a:t>Chúa</a:t>
-            </a:r>
-            <a:endParaRPr lang="vi-VN" sz="3600" b="1" dirty="0"/>
-          </a:p>
-          <a:p>
-            <a:pPr marL="0" indent="0" algn="ctr">
-              <a:buNone/>
-            </a:pPr>
-            <a:r>
-              <a:rPr lang="vi-VN" sz="3600" b="1" dirty="0"/>
-              <a:t>Người người cùng hát vang lừng vui đón </a:t>
-            </a:r>
-            <a:r>
-              <a:rPr lang="vi-VN" sz="3600" b="1" dirty="0"/>
-              <a:t>xuân</a:t>
-            </a:r>
-            <a:endParaRPr lang="vi-VN" sz="3600" b="1" dirty="0"/>
-          </a:p>
-          <a:p>
-            <a:pPr marL="0" indent="0" algn="ctr">
-              <a:buNone/>
-            </a:pPr>
-            <a:r>
-              <a:rPr lang="vi-VN" sz="3600" b="1" dirty="0"/>
-              <a:t>Người người cùng vui chúc nhau xuân an lành</a:t>
-            </a:r>
+            <a:pPr algn="ctr"/>
+            <a:r>
+              <a:rPr lang="en-US" sz="3200" b="1" dirty="0">
+                <a:solidFill>
+                  <a:srgbClr val="000066"/>
+                </a:solidFill>
+                <a:effectLst/>
+              </a:rPr>
+              <a:t>( 2 / 3 )</a:t>
+            </a:r>
+            <a:endParaRPr lang="vi-VN" sz="3200" b="1" dirty="0">
+              <a:solidFill>
+                <a:srgbClr val="000066"/>
+              </a:solidFill>
+              <a:effectLst/>
+            </a:endParaRPr>
           </a:p>
         </p:txBody>
       </p:sp>
     </p:spTree>
     <p:extLst>
       <p:ext uri="{BB962C8B-B14F-4D97-AF65-F5344CB8AC3E}">
-        <p14:creationId xmlns:p14="http://schemas.microsoft.com/office/powerpoint/2010/main" val="2383167392"/>
+        <p14:creationId xmlns:p14="http://schemas.microsoft.com/office/powerpoint/2010/main" val="751713594"/>
+      </p:ext>
+    </p:extLst>
+  </p:cSld>
+  <p:clrMapOvr>
+    <a:masterClrMapping/>
+  </p:clrMapOvr>
+</p:sld>
+</file>
+
+<file path=ppt/slides/slide7.xml><?xml version="1.0" encoding="utf-8"?>
+<p:sld xmlns:a="http://schemas.openxmlformats.org/drawingml/2006/main" xmlns:r="http://schemas.openxmlformats.org/officeDocument/2006/relationships" xmlns:p="http://schemas.openxmlformats.org/presentationml/2006/main">
+  <p:cSld>
+    <p:spTree>
+      <p:nvGrpSpPr>
+        <p:cNvPr id="1" name="">
+          <a:extLst>
+            <a:ext uri="{FF2B5EF4-FFF2-40B4-BE49-F238E27FC236}">
+              <a16:creationId xmlns:a16="http://schemas.microsoft.com/office/drawing/2014/main" id="{5C8B9FA0-EA93-D922-04BD-FACF9A06BEA8}"/>
+            </a:ext>
+          </a:extLst>
+        </p:cNvPr>
+        <p:cNvGrpSpPr/>
+        <p:nvPr/>
+      </p:nvGrpSpPr>
+      <p:grpSpPr>
+        <a:xfrm>
+          <a:off x="0" y="0"/>
+          <a:ext cx="0" cy="0"/>
+          <a:chOff x="0" y="0"/>
+          <a:chExt cx="0" cy="0"/>
+        </a:xfrm>
+      </p:grpSpPr>
+      <p:sp>
+        <p:nvSpPr>
+          <p:cNvPr id="5" name="內容版面配置區 4">
+            <a:extLst>
+              <a:ext uri="{FF2B5EF4-FFF2-40B4-BE49-F238E27FC236}">
+                <a16:creationId xmlns:a16="http://schemas.microsoft.com/office/drawing/2014/main" id="{34AF24DB-0240-3BA7-A053-854A37F818C7}"/>
+              </a:ext>
+            </a:extLst>
+          </p:cNvPr>
+          <p:cNvSpPr>
+            <a:spLocks noGrp="1"/>
+          </p:cNvSpPr>
+          <p:nvPr>
+            <p:ph idx="1"/>
+          </p:nvPr>
+        </p:nvSpPr>
+        <p:spPr>
+          <a:xfrm>
+            <a:off x="0" y="2084851"/>
+            <a:ext cx="12192000" cy="2404863"/>
+          </a:xfrm>
+        </p:spPr>
+        <p:txBody>
+          <a:bodyPr anchor="ctr">
+            <a:normAutofit/>
+          </a:bodyPr>
+          <a:lstStyle/>
+          <a:p>
+            <a:pPr marL="0" indent="0" algn="ctr">
+              <a:buNone/>
+            </a:pPr>
+            <a:r>
+              <a:rPr lang="vi-VN" sz="4400" b="1" dirty="0">
+                <a:solidFill>
+                  <a:srgbClr val="000066"/>
+                </a:solidFill>
+                <a:latin typeface="Times New Roman" panose="02020603050405020304" pitchFamily="18" charset="0"/>
+                <a:cs typeface="Times New Roman" panose="02020603050405020304" pitchFamily="18" charset="0"/>
+              </a:rPr>
+              <a:t>Xuân xuân đã về điểm tô tâm hồn nhân loại</a:t>
+            </a:r>
+          </a:p>
+          <a:p>
+            <a:pPr marL="0" indent="0" algn="ctr">
+              <a:buNone/>
+            </a:pPr>
+            <a:r>
+              <a:rPr lang="vi-VN" sz="4400" b="1" dirty="0">
+                <a:solidFill>
+                  <a:srgbClr val="000066"/>
+                </a:solidFill>
+                <a:latin typeface="Times New Roman" panose="02020603050405020304" pitchFamily="18" charset="0"/>
+                <a:cs typeface="Times New Roman" panose="02020603050405020304" pitchFamily="18" charset="0"/>
+              </a:rPr>
+              <a:t>Xuân ơi hãy đẹp mãi trên môi cười thế nhân</a:t>
+            </a:r>
+          </a:p>
+        </p:txBody>
+      </p:sp>
+      <p:sp>
+        <p:nvSpPr>
+          <p:cNvPr id="3" name="TextBox 2">
+            <a:extLst>
+              <a:ext uri="{FF2B5EF4-FFF2-40B4-BE49-F238E27FC236}">
+                <a16:creationId xmlns:a16="http://schemas.microsoft.com/office/drawing/2014/main" id="{FC0F08D9-1D27-3459-B9A6-B5E80ABE3FC2}"/>
+              </a:ext>
+            </a:extLst>
+          </p:cNvPr>
+          <p:cNvSpPr txBox="1"/>
+          <p:nvPr/>
+        </p:nvSpPr>
+        <p:spPr>
+          <a:xfrm>
+            <a:off x="0" y="5253203"/>
+            <a:ext cx="12192000" cy="584775"/>
+          </a:xfrm>
+          <a:prstGeom prst="rect">
+            <a:avLst/>
+          </a:prstGeom>
+          <a:noFill/>
+        </p:spPr>
+        <p:txBody>
+          <a:bodyPr wrap="square" rtlCol="0">
+            <a:spAutoFit/>
+          </a:bodyPr>
+          <a:lstStyle/>
+          <a:p>
+            <a:pPr algn="ctr"/>
+            <a:r>
+              <a:rPr lang="en-US" sz="3200" b="1" dirty="0">
+                <a:solidFill>
+                  <a:srgbClr val="000066"/>
+                </a:solidFill>
+                <a:effectLst/>
+              </a:rPr>
+              <a:t>( 2 / 3 )</a:t>
+            </a:r>
+            <a:endParaRPr lang="vi-VN" sz="3200" b="1" dirty="0">
+              <a:solidFill>
+                <a:srgbClr val="000066"/>
+              </a:solidFill>
+              <a:effectLst/>
+            </a:endParaRPr>
+          </a:p>
+        </p:txBody>
+      </p:sp>
+    </p:spTree>
+    <p:extLst>
+      <p:ext uri="{BB962C8B-B14F-4D97-AF65-F5344CB8AC3E}">
+        <p14:creationId xmlns:p14="http://schemas.microsoft.com/office/powerpoint/2010/main" val="3500092419"/>
+      </p:ext>
+    </p:extLst>
+  </p:cSld>
+  <p:clrMapOvr>
+    <a:masterClrMapping/>
+  </p:clrMapOvr>
+</p:sld>
+</file>
+
+<file path=ppt/slides/slide8.xml><?xml version="1.0" encoding="utf-8"?>
+<p:sld xmlns:a="http://schemas.openxmlformats.org/drawingml/2006/main" xmlns:r="http://schemas.openxmlformats.org/officeDocument/2006/relationships" xmlns:p="http://schemas.openxmlformats.org/presentationml/2006/main">
+  <p:cSld>
+    <p:spTree>
+      <p:nvGrpSpPr>
+        <p:cNvPr id="1" name="">
+          <a:extLst>
+            <a:ext uri="{FF2B5EF4-FFF2-40B4-BE49-F238E27FC236}">
+              <a16:creationId xmlns:a16="http://schemas.microsoft.com/office/drawing/2014/main" id="{B6703D64-1A54-1982-C81D-21625163B8F6}"/>
+            </a:ext>
+          </a:extLst>
+        </p:cNvPr>
+        <p:cNvGrpSpPr/>
+        <p:nvPr/>
+      </p:nvGrpSpPr>
+      <p:grpSpPr>
+        <a:xfrm>
+          <a:off x="0" y="0"/>
+          <a:ext cx="0" cy="0"/>
+          <a:chOff x="0" y="0"/>
+          <a:chExt cx="0" cy="0"/>
+        </a:xfrm>
+      </p:grpSpPr>
+      <p:sp>
+        <p:nvSpPr>
+          <p:cNvPr id="5" name="內容版面配置區 4">
+            <a:extLst>
+              <a:ext uri="{FF2B5EF4-FFF2-40B4-BE49-F238E27FC236}">
+                <a16:creationId xmlns:a16="http://schemas.microsoft.com/office/drawing/2014/main" id="{C885DE60-A5C0-DDD2-96F5-A5BE9AA93441}"/>
+              </a:ext>
+            </a:extLst>
+          </p:cNvPr>
+          <p:cNvSpPr>
+            <a:spLocks noGrp="1"/>
+          </p:cNvSpPr>
+          <p:nvPr>
+            <p:ph idx="1"/>
+          </p:nvPr>
+        </p:nvSpPr>
+        <p:spPr>
+          <a:xfrm>
+            <a:off x="0" y="2084851"/>
+            <a:ext cx="12192000" cy="2404863"/>
+          </a:xfrm>
+        </p:spPr>
+        <p:txBody>
+          <a:bodyPr anchor="ctr">
+            <a:normAutofit/>
+          </a:bodyPr>
+          <a:lstStyle/>
+          <a:p>
+            <a:pPr marL="0" indent="0" algn="ctr">
+              <a:buNone/>
+            </a:pPr>
+            <a:r>
+              <a:rPr lang="vi-VN" sz="4400" b="1" dirty="0">
+                <a:solidFill>
+                  <a:srgbClr val="000066"/>
+                </a:solidFill>
+                <a:latin typeface="Times New Roman" panose="02020603050405020304" pitchFamily="18" charset="0"/>
+                <a:cs typeface="Times New Roman" panose="02020603050405020304" pitchFamily="18" charset="0"/>
+              </a:rPr>
+              <a:t>Lòng mừng chào đón xuân về muôn sắc hoa</a:t>
+            </a:r>
+          </a:p>
+          <a:p>
+            <a:pPr marL="0" indent="0" algn="ctr">
+              <a:buNone/>
+            </a:pPr>
+            <a:r>
+              <a:rPr lang="vi-VN" sz="4400" b="1" dirty="0">
+                <a:solidFill>
+                  <a:srgbClr val="000066"/>
+                </a:solidFill>
+                <a:latin typeface="Times New Roman" panose="02020603050405020304" pitchFamily="18" charset="0"/>
+                <a:cs typeface="Times New Roman" panose="02020603050405020304" pitchFamily="18" charset="0"/>
+              </a:rPr>
+              <a:t>Nguyện cầu mùa xuân an lành trên dân Chúa</a:t>
+            </a:r>
+            <a:endParaRPr lang="en-US" altLang="zh-TW" sz="4400" b="1" dirty="0">
+              <a:solidFill>
+                <a:srgbClr val="000066"/>
+              </a:solidFill>
+              <a:latin typeface="Times New Roman" panose="02020603050405020304" pitchFamily="18" charset="0"/>
+              <a:cs typeface="Times New Roman" panose="02020603050405020304" pitchFamily="18" charset="0"/>
+            </a:endParaRPr>
+          </a:p>
+        </p:txBody>
+      </p:sp>
+    </p:spTree>
+    <p:extLst>
+      <p:ext uri="{BB962C8B-B14F-4D97-AF65-F5344CB8AC3E}">
+        <p14:creationId xmlns:p14="http://schemas.microsoft.com/office/powerpoint/2010/main" val="862543086"/>
+      </p:ext>
+    </p:extLst>
+  </p:cSld>
+  <p:clrMapOvr>
+    <a:masterClrMapping/>
+  </p:clrMapOvr>
+</p:sld>
+</file>
+
+<file path=ppt/slides/slide9.xml><?xml version="1.0" encoding="utf-8"?>
+<p:sld xmlns:a="http://schemas.openxmlformats.org/drawingml/2006/main" xmlns:r="http://schemas.openxmlformats.org/officeDocument/2006/relationships" xmlns:p="http://schemas.openxmlformats.org/presentationml/2006/main">
+  <p:cSld>
+    <p:spTree>
+      <p:nvGrpSpPr>
+        <p:cNvPr id="1" name="">
+          <a:extLst>
+            <a:ext uri="{FF2B5EF4-FFF2-40B4-BE49-F238E27FC236}">
+              <a16:creationId xmlns:a16="http://schemas.microsoft.com/office/drawing/2014/main" id="{C4838B67-87F5-0D88-0924-ED2A61B2BAEF}"/>
+            </a:ext>
+          </a:extLst>
+        </p:cNvPr>
+        <p:cNvGrpSpPr/>
+        <p:nvPr/>
+      </p:nvGrpSpPr>
+      <p:grpSpPr>
+        <a:xfrm>
+          <a:off x="0" y="0"/>
+          <a:ext cx="0" cy="0"/>
+          <a:chOff x="0" y="0"/>
+          <a:chExt cx="0" cy="0"/>
+        </a:xfrm>
+      </p:grpSpPr>
+      <p:sp>
+        <p:nvSpPr>
+          <p:cNvPr id="5" name="內容版面配置區 4">
+            <a:extLst>
+              <a:ext uri="{FF2B5EF4-FFF2-40B4-BE49-F238E27FC236}">
+                <a16:creationId xmlns:a16="http://schemas.microsoft.com/office/drawing/2014/main" id="{6C1747FA-2D4E-EF89-F2F5-6CD62BF4A352}"/>
+              </a:ext>
+            </a:extLst>
+          </p:cNvPr>
+          <p:cNvSpPr>
+            <a:spLocks noGrp="1"/>
+          </p:cNvSpPr>
+          <p:nvPr>
+            <p:ph idx="1"/>
+          </p:nvPr>
+        </p:nvSpPr>
+        <p:spPr>
+          <a:xfrm>
+            <a:off x="0" y="2084851"/>
+            <a:ext cx="12192000" cy="2404863"/>
+          </a:xfrm>
+        </p:spPr>
+        <p:txBody>
+          <a:bodyPr anchor="ctr">
+            <a:normAutofit/>
+          </a:bodyPr>
+          <a:lstStyle/>
+          <a:p>
+            <a:pPr marL="0" indent="0" algn="ctr">
+              <a:buNone/>
+            </a:pPr>
+            <a:r>
+              <a:rPr lang="vi-VN" sz="4400" b="1" dirty="0">
+                <a:solidFill>
+                  <a:srgbClr val="000066"/>
+                </a:solidFill>
+                <a:latin typeface="Times New Roman" panose="02020603050405020304" pitchFamily="18" charset="0"/>
+                <a:cs typeface="Times New Roman" panose="02020603050405020304" pitchFamily="18" charset="0"/>
+              </a:rPr>
+              <a:t>Người người cùng hát vang lừng vui đón xuân</a:t>
+            </a:r>
+          </a:p>
+          <a:p>
+            <a:pPr marL="0" indent="0" algn="ctr">
+              <a:buNone/>
+            </a:pPr>
+            <a:r>
+              <a:rPr lang="vi-VN" sz="4400" b="1" dirty="0">
+                <a:solidFill>
+                  <a:srgbClr val="000066"/>
+                </a:solidFill>
+                <a:latin typeface="Times New Roman" panose="02020603050405020304" pitchFamily="18" charset="0"/>
+                <a:cs typeface="Times New Roman" panose="02020603050405020304" pitchFamily="18" charset="0"/>
+              </a:rPr>
+              <a:t>Người người cùng vui chúc nhau xuân an lành</a:t>
+            </a:r>
+            <a:endParaRPr lang="en-US" altLang="zh-TW" sz="4400" b="1" dirty="0">
+              <a:solidFill>
+                <a:srgbClr val="000066"/>
+              </a:solidFill>
+              <a:latin typeface="Times New Roman" panose="02020603050405020304" pitchFamily="18" charset="0"/>
+              <a:cs typeface="Times New Roman" panose="02020603050405020304" pitchFamily="18" charset="0"/>
+            </a:endParaRPr>
+          </a:p>
+        </p:txBody>
+      </p:sp>
+    </p:spTree>
+    <p:extLst>
+      <p:ext uri="{BB962C8B-B14F-4D97-AF65-F5344CB8AC3E}">
+        <p14:creationId xmlns:p14="http://schemas.microsoft.com/office/powerpoint/2010/main" val="3842272630"/>
       </p:ext>
     </p:extLst>
   </p:cSld>
@@ -4160,7 +5045,7 @@
   <a:extraClrSchemeLst/>
   <a:extLst>
     <a:ext uri="{05A4C25C-085E-4340-85A3-A5531E510DB2}">
-      <thm15:themeFamily xmlns:thm15="http://schemas.microsoft.com/office/thememl/2012/main" name="Theme1" id="{AFC7C034-021A-479F-A5B0-F4AE2AC2A6F8}" vid="{E4B01A5C-7C0B-4AB8-8973-047186F18E30}"/>
+      <thm15:themeFamily xmlns:thm15="http://schemas.microsoft.com/office/thememl/2012/main" name="template_Viet_ngu" id="{B6A830E8-B6D0-4407-A351-D7866D5057A8}" vid="{DA9B3E39-6D52-437C-A49B-DB14F9DF999C}"/>
     </a:ext>
   </a:extLst>
 </a:theme>
